--- a/docs/OE_Group_IPMS_Demo_Readiness.pptx
+++ b/docs/OE_Group_IPMS_Demo_Readiness.pptx
@@ -4,6 +4,9 @@
   <p:sldMasterIdLst>
     <p:sldMasterId id="2147483648" r:id="rId1"/>
   </p:sldMasterIdLst>
+  <p:notesMasterIdLst>
+    <p:notesMasterId r:id="rId12"/>
+  </p:notesMasterIdLst>
   <p:sldIdLst>
     <p:sldId id="256" r:id="rId2"/>
     <p:sldId id="257" r:id="rId3"/>
@@ -16,9 +19,6 @@
     <p:sldId id="264" r:id="rId10"/>
     <p:sldId id="265" r:id="rId11"/>
   </p:sldIdLst>
-  <p:notesMasterIdLst>
-    <p:notesMasterId r:id="rId12"/>
-  </p:notesMasterIdLst>
   <p:sldSz cx="12192000" cy="6858000"/>
   <p:notesSz cx="6858000" cy="12192000"/>
   <p:defaultTextStyle>
@@ -113,6 +113,11 @@
       </a:defRPr>
     </a:lvl9pPr>
   </p:defaultTextStyle>
+  <p:extLst>
+    <p:ext uri="{EFAFB233-063F-42B5-8137-9DF3F51BA10A}">
+      <p15:sldGuideLst xmlns:p15="http://schemas.microsoft.com/office/powerpoint/2012/main"/>
+    </p:ext>
+  </p:extLst>
 </p:presentation>
 </file>
 
@@ -138,234 +143,10 @@
           <a:chExt cx="0" cy="0"/>
         </a:xfrm>
       </p:grpSpPr>
-      <p:sp>
-        <p:nvSpPr>
-          <p:cNvPr id="2" name="Header Placeholder 1"/>
-          <p:cNvSpPr>
-            <a:spLocks noGrp="1"/>
-          </p:cNvSpPr>
-          <p:nvPr>
-            <p:ph type="hdr" sz="quarter"/>
-          </p:nvPr>
-        </p:nvSpPr>
-        <p:spPr>
-          <a:xfrm>
-            <a:off x="0" y="0"/>
-            <a:ext cx="2971800" cy="458788"/>
-          </a:xfrm>
-          <a:prstGeom prst="rect">
-            <a:avLst/>
-          </a:prstGeom>
-        </p:spPr>
-        <p:txBody>
-          <a:bodyPr vert="horz" lIns="91440" tIns="45720" rIns="91440" bIns="45720" rtlCol="0"/>
-          <a:lstStyle>
-            <a:lvl1pPr algn="l">
-              <a:defRPr sz="1200"/>
-            </a:lvl1pPr>
-          </a:lstStyle>
-          <a:p>
-            <a:endParaRPr lang="en-US"/>
-          </a:p>
-        </p:txBody>
-      </p:sp>
-      <p:sp>
-        <p:nvSpPr>
-          <p:cNvPr id="3" name="Date Placeholder 2"/>
-          <p:cNvSpPr>
-            <a:spLocks noGrp="1"/>
-          </p:cNvSpPr>
-          <p:nvPr>
-            <p:ph type="dt" idx="1"/>
-          </p:nvPr>
-        </p:nvSpPr>
-        <p:spPr>
-          <a:xfrm>
-            <a:off x="3884613" y="0"/>
-            <a:ext cx="2971800" cy="458788"/>
-          </a:xfrm>
-          <a:prstGeom prst="rect">
-            <a:avLst/>
-          </a:prstGeom>
-        </p:spPr>
-        <p:txBody>
-          <a:bodyPr vert="horz" lIns="91440" tIns="45720" rIns="91440" bIns="45720" rtlCol="0"/>
-          <a:lstStyle>
-            <a:lvl1pPr algn="r">
-              <a:defRPr sz="1200"/>
-            </a:lvl1pPr>
-          </a:lstStyle>
-          <a:p>
-            <a:fld id="{5282F153-3F37-0F45-9E97-73ACFA13230C}" type="datetimeFigureOut">
-              <a:rPr lang="en-US"/>
-              <a:t>7/23/19</a:t>
-            </a:fld>
-            <a:endParaRPr lang="en-US"/>
-          </a:p>
-        </p:txBody>
-      </p:sp>
-      <p:sp>
-        <p:nvSpPr>
-          <p:cNvPr id="4" name="Slide Image Placeholder 3"/>
-          <p:cNvSpPr>
-            <a:spLocks noGrp="1" noRot="1" noChangeAspect="1"/>
-          </p:cNvSpPr>
-          <p:nvPr>
-            <p:ph type="sldImg" idx="2"/>
-          </p:nvPr>
-        </p:nvSpPr>
-        <p:spPr>
-          <a:xfrm>
-            <a:off x="685800" y="1143000"/>
-            <a:ext cx="5486400" cy="3086100"/>
-          </a:xfrm>
-          <a:prstGeom prst="rect">
-            <a:avLst/>
-          </a:prstGeom>
-          <a:noFill/>
-          <a:ln w="12700">
-            <a:solidFill>
-              <a:prstClr val="black"/>
-            </a:solidFill>
-          </a:ln>
-        </p:spPr>
-        <p:txBody>
-          <a:bodyPr vert="horz" lIns="91440" tIns="45720" rIns="91440" bIns="45720" rtlCol="0" anchor="ctr"/>
-          <a:lstStyle/>
-          <a:p>
-            <a:endParaRPr lang="en-US"/>
-          </a:p>
-        </p:txBody>
-      </p:sp>
-      <p:sp>
-        <p:nvSpPr>
-          <p:cNvPr id="5" name="Notes Placeholder 4"/>
-          <p:cNvSpPr>
-            <a:spLocks noGrp="1"/>
-          </p:cNvSpPr>
-          <p:nvPr>
-            <p:ph type="body" sz="quarter" idx="3"/>
-          </p:nvPr>
-        </p:nvSpPr>
-        <p:spPr>
-          <a:xfrm>
-            <a:off x="685800" y="4400550"/>
-            <a:ext cx="5486400" cy="3600450"/>
-          </a:xfrm>
-          <a:prstGeom prst="rect">
-            <a:avLst/>
-          </a:prstGeom>
-        </p:spPr>
-        <p:txBody>
-          <a:bodyPr vert="horz" lIns="91440" tIns="45720" rIns="91440" bIns="45720" rtlCol="0"/>
-          <a:lstStyle/>
-          <a:p>
-            <a:pPr lvl="0"/>
-            <a:r>
-              <a:rPr lang="en-US"/>
-              <a:t>Click to edit Master text styles</a:t>
-            </a:r>
-          </a:p>
-          <a:p>
-            <a:pPr lvl="1"/>
-            <a:r>
-              <a:rPr lang="en-US"/>
-              <a:t>Second level</a:t>
-            </a:r>
-          </a:p>
-          <a:p>
-            <a:pPr lvl="2"/>
-            <a:r>
-              <a:rPr lang="en-US"/>
-              <a:t>Third level</a:t>
-            </a:r>
-          </a:p>
-          <a:p>
-            <a:pPr lvl="3"/>
-            <a:r>
-              <a:rPr lang="en-US"/>
-              <a:t>Fourth level</a:t>
-            </a:r>
-          </a:p>
-          <a:p>
-            <a:pPr lvl="4"/>
-            <a:r>
-              <a:rPr lang="en-US"/>
-              <a:t>Fifth level</a:t>
-            </a:r>
-          </a:p>
-        </p:txBody>
-      </p:sp>
-      <p:sp>
-        <p:nvSpPr>
-          <p:cNvPr id="6" name="Footer Placeholder 5"/>
-          <p:cNvSpPr>
-            <a:spLocks noGrp="1"/>
-          </p:cNvSpPr>
-          <p:nvPr>
-            <p:ph type="ftr" sz="quarter" idx="4"/>
-          </p:nvPr>
-        </p:nvSpPr>
-        <p:spPr>
-          <a:xfrm>
-            <a:off x="0" y="8685213"/>
-            <a:ext cx="2971800" cy="458787"/>
-          </a:xfrm>
-          <a:prstGeom prst="rect">
-            <a:avLst/>
-          </a:prstGeom>
-        </p:spPr>
-        <p:txBody>
-          <a:bodyPr vert="horz" lIns="91440" tIns="45720" rIns="91440" bIns="45720" rtlCol="0" anchor="b"/>
-          <a:lstStyle>
-            <a:lvl1pPr algn="l">
-              <a:defRPr sz="1200"/>
-            </a:lvl1pPr>
-          </a:lstStyle>
-          <a:p>
-            <a:endParaRPr lang="en-US"/>
-          </a:p>
-        </p:txBody>
-      </p:sp>
-      <p:sp>
-        <p:nvSpPr>
-          <p:cNvPr id="7" name="Slide Number Placeholder 6"/>
-          <p:cNvSpPr>
-            <a:spLocks noGrp="1"/>
-          </p:cNvSpPr>
-          <p:nvPr>
-            <p:ph type="sldNum" sz="quarter" idx="5"/>
-          </p:nvPr>
-        </p:nvSpPr>
-        <p:spPr>
-          <a:xfrm>
-            <a:off x="3884613" y="8685213"/>
-            <a:ext cx="2971800" cy="458787"/>
-          </a:xfrm>
-          <a:prstGeom prst="rect">
-            <a:avLst/>
-          </a:prstGeom>
-        </p:spPr>
-        <p:txBody>
-          <a:bodyPr vert="horz" lIns="91440" tIns="45720" rIns="91440" bIns="45720" rtlCol="0" anchor="b"/>
-          <a:lstStyle>
-            <a:lvl1pPr algn="r">
-              <a:defRPr sz="1200"/>
-            </a:lvl1pPr>
-          </a:lstStyle>
-          <a:p>
-            <a:fld id="{CE5E9CC1-C706-0F49-92D6-E571CC5EEA8F}" type="slidenum">
-              <a:rPr lang="en-US"/>
-              <a:t>‹#›</a:t>
-            </a:fld>
-            <a:endParaRPr lang="en-US"/>
-          </a:p>
-        </p:txBody>
-      </p:sp>
     </p:spTree>
     <p:extLst>
       <p:ext uri="{BB962C8B-B14F-4D97-AF65-F5344CB8AC3E}">
-        <p14:creationId xmlns:p14="http://schemas.microsoft.com/office/powerpoint/2010/main" val="1024086991"/>
+        <p14:creationId xmlns:p14="http://schemas.microsoft.com/office/powerpoint/2010/main" val="4259357868"/>
       </p:ext>
     </p:extLst>
   </p:cSld>
@@ -513,7 +294,6 @@
               <a:rPr lang="en-US" dirty="0"/>
               <a:t>Framing: this is a readiness review, not a progress report. The build is functionally complete across all six modules; what follows is what the August board changed, what that cost, and the short list of things still owed before real client data lands.</a:t>
             </a:r>
-            <a:endParaRPr lang="en-US" dirty="0"/>
           </a:p>
         </p:txBody>
       </p:sp>
@@ -601,7 +381,6 @@
               <a:rPr lang="en-US" dirty="0"/>
               <a:t>Close on the three asks. Everything else on the outstanding list is work already scheduled and not a decision the board needs to make in the room.</a:t>
             </a:r>
-            <a:endParaRPr lang="en-US" dirty="0"/>
           </a:p>
         </p:txBody>
       </p:sp>
@@ -689,7 +468,6 @@
               <a:rPr lang="en-US" dirty="0"/>
               <a:t>The 4 outstanding suites: two exceed the parallel runner's time limit but pass when run on their own, one needs a running dev server, and one belongs to an uncommitted admin-fee migration from a separate workstream. None is a defect in this branch.</a:t>
             </a:r>
-            <a:endParaRPr lang="en-US" dirty="0"/>
           </a:p>
         </p:txBody>
       </p:sp>
@@ -777,7 +555,6 @@
               <a:rPr lang="en-US" dirty="0"/>
               <a:t>Decision 17 (vendor self-service) was taken on 17 Aug and its UI has now been built — covered later in this deck.</a:t>
             </a:r>
-            <a:endParaRPr lang="en-US" dirty="0"/>
           </a:p>
         </p:txBody>
       </p:sp>
@@ -865,7 +642,6 @@
               <a:rPr lang="en-US" dirty="0"/>
               <a:t>This is the single most important slide for an auditor. The mechanism — correct rules composing into an unintended outcome, with tests that ratified it — is the failure mode worth watching for, not the instance.</a:t>
             </a:r>
-            <a:endParaRPr lang="en-US" dirty="0"/>
           </a:p>
         </p:txBody>
       </p:sp>
@@ -949,10 +725,6 @@
           <a:bodyPr/>
           <a:lstStyle/>
           <a:p>
-            <a:r>
-              <a:rPr lang="en-US" dirty="0"/>
-              <a:t/>
-            </a:r>
             <a:endParaRPr lang="en-US" dirty="0"/>
           </a:p>
         </p:txBody>
@@ -1041,7 +813,6 @@
               <a:rPr lang="en-US" dirty="0"/>
               <a:t>Stage 1 was named 'Job sign-off and approval for payment'. The second half made 'Requires Tier 2' appear above a stage no tier applies to, and invited the reading that an FM is the first of three approvers rather than the person whose evidence the approvers check.</a:t>
             </a:r>
-            <a:endParaRPr lang="en-US" dirty="0"/>
           </a:p>
         </p:txBody>
       </p:sp>
@@ -1125,10 +896,6 @@
           <a:bodyPr/>
           <a:lstStyle/>
           <a:p>
-            <a:r>
-              <a:rPr lang="en-US" dirty="0"/>
-              <a:t/>
-            </a:r>
             <a:endParaRPr lang="en-US" dirty="0"/>
           </a:p>
         </p:txBody>
@@ -1217,7 +984,6 @@
               <a:rPr lang="en-US" dirty="0"/>
               <a:t>The common thread: every one was found because something enumerated the rule rather than checking the diff. That is the practice worth funding, not the individual fixes.</a:t>
             </a:r>
-            <a:endParaRPr lang="en-US" dirty="0"/>
           </a:p>
         </p:txBody>
       </p:sp>
@@ -1301,10 +1067,6 @@
           <a:bodyPr/>
           <a:lstStyle/>
           <a:p>
-            <a:r>
-              <a:rPr lang="en-US" dirty="0"/>
-              <a:t/>
-            </a:r>
             <a:endParaRPr lang="en-US" dirty="0"/>
           </a:p>
         </p:txBody>
@@ -1378,6 +1140,11 @@
 <file path=ppt/slideMasters/slideMaster1.xml><?xml version="1.0" encoding="utf-8"?>
 <p:sldMaster xmlns:a="http://schemas.openxmlformats.org/drawingml/2006/main" xmlns:r="http://schemas.openxmlformats.org/officeDocument/2006/relationships" xmlns:p="http://schemas.openxmlformats.org/presentationml/2006/main">
   <p:cSld>
+    <p:bg>
+      <p:bgRef idx="1001">
+        <a:schemeClr val="bg1"/>
+      </p:bgRef>
+    </p:bg>
     <p:spTree>
       <p:nvGrpSpPr>
         <p:cNvPr id="1" name=""/>
@@ -1660,6 +1427,7 @@
         <a:solidFill>
           <a:srgbClr val="1E2761"/>
         </a:solidFill>
+        <a:effectLst/>
       </p:bgPr>
     </p:bg>
     <p:spTree>
@@ -1697,11 +1465,11 @@
           <a:bodyPr wrap="square" lIns="0" tIns="0" rIns="0" bIns="0" rtlCol="0" anchor="ctr"/>
           <a:lstStyle/>
           <a:p>
-            <a:pPr indent="0" marL="0">
-              <a:buNone/>
-            </a:pPr>
-            <a:r>
-              <a:rPr lang="en-US" sz="1200" b="1" spc="200" kern="0" dirty="0">
+            <a:pPr marL="0" indent="0">
+              <a:buNone/>
+            </a:pPr>
+            <a:r>
+              <a:rPr lang="en-US" sz="1200" b="1" kern="0" spc="200" dirty="0">
                 <a:solidFill>
                   <a:srgbClr val="CADCFC"/>
                 </a:solidFill>
@@ -1736,7 +1504,7 @@
           <a:bodyPr wrap="square" lIns="0" tIns="0" rIns="0" bIns="0" rtlCol="0" anchor="ctr"/>
           <a:lstStyle/>
           <a:p>
-            <a:pPr indent="0" marL="0">
+            <a:pPr marL="0" indent="0">
               <a:buNone/>
             </a:pPr>
             <a:r>
@@ -1775,7 +1543,7 @@
           <a:bodyPr wrap="square" lIns="0" tIns="0" rIns="0" bIns="0" rtlCol="0" anchor="ctr"/>
           <a:lstStyle/>
           <a:p>
-            <a:pPr indent="0" marL="0">
+            <a:pPr marL="0" indent="0">
               <a:buNone/>
             </a:pPr>
             <a:r>
@@ -1814,7 +1582,7 @@
           <a:bodyPr wrap="square" lIns="0" tIns="0" rIns="0" bIns="0" rtlCol="0" anchor="ctr"/>
           <a:lstStyle/>
           <a:p>
-            <a:pPr indent="0" marL="0">
+            <a:pPr marL="0" indent="0">
               <a:buNone/>
             </a:pPr>
             <a:r>
@@ -1880,7 +1648,7 @@
           <a:bodyPr wrap="square" lIns="0" tIns="0" rIns="0" bIns="0" rtlCol="0" anchor="ctr"/>
           <a:lstStyle/>
           <a:p>
-            <a:pPr indent="0" marL="0">
+            <a:pPr marL="0" indent="0">
               <a:buNone/>
             </a:pPr>
             <a:r>
@@ -1919,7 +1687,7 @@
           <a:bodyPr wrap="square" lIns="0" tIns="0" rIns="0" bIns="0" rtlCol="0" anchor="ctr"/>
           <a:lstStyle/>
           <a:p>
-            <a:pPr indent="0" marL="0">
+            <a:pPr marL="0" indent="0">
               <a:buNone/>
             </a:pPr>
             <a:r>
@@ -1966,84 +1734,6 @@
       </p:sp>
       <p:sp>
         <p:nvSpPr>
-          <p:cNvPr id="10" name="Text 8"/>
-          <p:cNvSpPr/>
-          <p:nvPr/>
-        </p:nvSpPr>
-        <p:spPr>
-          <a:xfrm>
-            <a:off x="868680" y="4160520"/>
-            <a:ext cx="2926080" cy="274320"/>
-          </a:xfrm>
-          <a:prstGeom prst="rect">
-            <a:avLst/>
-          </a:prstGeom>
-          <a:noFill/>
-          <a:ln/>
-        </p:spPr>
-        <p:txBody>
-          <a:bodyPr wrap="square" lIns="0" tIns="0" rIns="0" bIns="0" rtlCol="0" anchor="ctr"/>
-          <a:lstStyle/>
-          <a:p>
-            <a:pPr indent="0" marL="0">
-              <a:buNone/>
-            </a:pPr>
-            <a:r>
-              <a:rPr lang="en-US" sz="1400" b="1" dirty="0">
-                <a:solidFill>
-                  <a:srgbClr val="FFFFFF"/>
-                </a:solidFill>
-                <a:latin typeface="Cambria" pitchFamily="34" charset="0"/>
-                <a:ea typeface="Cambria" pitchFamily="34" charset="-122"/>
-                <a:cs typeface="Cambria" pitchFamily="34" charset="-120"/>
-              </a:rPr>
-              <a:t>Dev + staging</a:t>
-            </a:r>
-            <a:endParaRPr lang="en-US" sz="1400" dirty="0"/>
-          </a:p>
-        </p:txBody>
-      </p:sp>
-      <p:sp>
-        <p:nvSpPr>
-          <p:cNvPr id="11" name="Text 9"/>
-          <p:cNvSpPr/>
-          <p:nvPr/>
-        </p:nvSpPr>
-        <p:spPr>
-          <a:xfrm>
-            <a:off x="868680" y="4462272"/>
-            <a:ext cx="2926080" cy="365760"/>
-          </a:xfrm>
-          <a:prstGeom prst="rect">
-            <a:avLst/>
-          </a:prstGeom>
-          <a:noFill/>
-          <a:ln/>
-        </p:spPr>
-        <p:txBody>
-          <a:bodyPr wrap="square" lIns="0" tIns="0" rIns="0" bIns="0" rtlCol="0" anchor="ctr"/>
-          <a:lstStyle/>
-          <a:p>
-            <a:pPr indent="0" marL="0">
-              <a:buNone/>
-            </a:pPr>
-            <a:r>
-              <a:rPr lang="en-US" sz="1100" dirty="0">
-                <a:solidFill>
-                  <a:srgbClr val="CADCFC"/>
-                </a:solidFill>
-                <a:latin typeface="Calibri" pitchFamily="34" charset="0"/>
-                <a:ea typeface="Calibri" pitchFamily="34" charset="-122"/>
-                <a:cs typeface="Calibri" pitchFamily="34" charset="-120"/>
-              </a:rPr>
-              <a:t>level at migration 0190</a:t>
-            </a:r>
-            <a:endParaRPr lang="en-US" sz="1100" dirty="0"/>
-          </a:p>
-        </p:txBody>
-      </p:sp>
-      <p:sp>
-        <p:nvSpPr>
           <p:cNvPr id="12" name="Shape 10"/>
           <p:cNvSpPr/>
           <p:nvPr/>
@@ -2077,7 +1767,7 @@
         </p:nvSpPr>
         <p:spPr>
           <a:xfrm>
-            <a:off x="868680" y="4160520"/>
+            <a:off x="4632960" y="4155141"/>
             <a:ext cx="2926080" cy="274320"/>
           </a:xfrm>
           <a:prstGeom prst="rect">
@@ -2090,7 +1780,7 @@
           <a:bodyPr wrap="square" lIns="0" tIns="0" rIns="0" bIns="0" rtlCol="0" anchor="ctr"/>
           <a:lstStyle/>
           <a:p>
-            <a:pPr indent="0" marL="0">
+            <a:pPr marL="0" indent="0">
               <a:buNone/>
             </a:pPr>
             <a:r>
@@ -2116,7 +1806,7 @@
         </p:nvSpPr>
         <p:spPr>
           <a:xfrm>
-            <a:off x="868680" y="4462272"/>
+            <a:off x="4632960" y="4462272"/>
             <a:ext cx="2926080" cy="365760"/>
           </a:xfrm>
           <a:prstGeom prst="rect">
@@ -2129,7 +1819,7 @@
           <a:bodyPr wrap="square" lIns="0" tIns="0" rIns="0" bIns="0" rtlCol="0" anchor="ctr"/>
           <a:lstStyle/>
           <a:p>
-            <a:pPr indent="0" marL="0">
+            <a:pPr marL="0" indent="0">
               <a:buNone/>
             </a:pPr>
             <a:r>
@@ -2142,6 +1832,84 @@
                 <a:cs typeface="Calibri" pitchFamily="34" charset="-120"/>
               </a:rPr>
               <a:t>run against the live database</a:t>
+            </a:r>
+            <a:endParaRPr lang="en-US" sz="1100" dirty="0"/>
+          </a:p>
+        </p:txBody>
+      </p:sp>
+      <p:sp>
+        <p:nvSpPr>
+          <p:cNvPr id="10" name="Text 8"/>
+          <p:cNvSpPr/>
+          <p:nvPr/>
+        </p:nvSpPr>
+        <p:spPr>
+          <a:xfrm>
+            <a:off x="8183880" y="4157830"/>
+            <a:ext cx="2926080" cy="274320"/>
+          </a:xfrm>
+          <a:prstGeom prst="rect">
+            <a:avLst/>
+          </a:prstGeom>
+          <a:noFill/>
+          <a:ln/>
+        </p:spPr>
+        <p:txBody>
+          <a:bodyPr wrap="square" lIns="0" tIns="0" rIns="0" bIns="0" rtlCol="0" anchor="ctr"/>
+          <a:lstStyle/>
+          <a:p>
+            <a:pPr marL="0" indent="0">
+              <a:buNone/>
+            </a:pPr>
+            <a:r>
+              <a:rPr lang="en-US" sz="1400" b="1" dirty="0">
+                <a:solidFill>
+                  <a:srgbClr val="FFFFFF"/>
+                </a:solidFill>
+                <a:latin typeface="Cambria" pitchFamily="34" charset="0"/>
+                <a:ea typeface="Cambria" pitchFamily="34" charset="-122"/>
+                <a:cs typeface="Cambria" pitchFamily="34" charset="-120"/>
+              </a:rPr>
+              <a:t>Dev + staging</a:t>
+            </a:r>
+            <a:endParaRPr lang="en-US" sz="1400" dirty="0"/>
+          </a:p>
+        </p:txBody>
+      </p:sp>
+      <p:sp>
+        <p:nvSpPr>
+          <p:cNvPr id="11" name="Text 9"/>
+          <p:cNvSpPr/>
+          <p:nvPr/>
+        </p:nvSpPr>
+        <p:spPr>
+          <a:xfrm>
+            <a:off x="8183880" y="4503420"/>
+            <a:ext cx="2926080" cy="365760"/>
+          </a:xfrm>
+          <a:prstGeom prst="rect">
+            <a:avLst/>
+          </a:prstGeom>
+          <a:noFill/>
+          <a:ln/>
+        </p:spPr>
+        <p:txBody>
+          <a:bodyPr wrap="square" lIns="0" tIns="0" rIns="0" bIns="0" rtlCol="0" anchor="ctr"/>
+          <a:lstStyle/>
+          <a:p>
+            <a:pPr marL="0" indent="0">
+              <a:buNone/>
+            </a:pPr>
+            <a:r>
+              <a:rPr lang="en-US" sz="1100" dirty="0">
+                <a:solidFill>
+                  <a:srgbClr val="CADCFC"/>
+                </a:solidFill>
+                <a:latin typeface="Calibri" pitchFamily="34" charset="0"/>
+                <a:ea typeface="Calibri" pitchFamily="34" charset="-122"/>
+                <a:cs typeface="Calibri" pitchFamily="34" charset="-120"/>
+              </a:rPr>
+              <a:t>level at migration 0190</a:t>
             </a:r>
             <a:endParaRPr lang="en-US" sz="1100" dirty="0"/>
           </a:p>
@@ -2163,6 +1931,7 @@
         <a:solidFill>
           <a:srgbClr val="1E2761"/>
         </a:solidFill>
+        <a:effectLst/>
       </p:bgPr>
     </p:bg>
     <p:spTree>
@@ -2200,11 +1969,11 @@
           <a:bodyPr wrap="square" lIns="0" tIns="0" rIns="0" bIns="0" rtlCol="0" anchor="ctr"/>
           <a:lstStyle/>
           <a:p>
-            <a:pPr indent="0" marL="0">
-              <a:buNone/>
-            </a:pPr>
-            <a:r>
-              <a:rPr lang="en-US" sz="1200" b="1" spc="200" kern="0" dirty="0">
+            <a:pPr marL="0" indent="0">
+              <a:buNone/>
+            </a:pPr>
+            <a:r>
+              <a:rPr lang="en-US" sz="1200" b="1" kern="0" spc="200" dirty="0">
                 <a:solidFill>
                   <a:srgbClr val="CADCFC"/>
                 </a:solidFill>
@@ -2239,7 +2008,7 @@
           <a:bodyPr wrap="square" lIns="0" tIns="0" rIns="0" bIns="0" rtlCol="0" anchor="ctr"/>
           <a:lstStyle/>
           <a:p>
-            <a:pPr indent="0" marL="0">
+            <a:pPr marL="0" indent="0">
               <a:buNone/>
             </a:pPr>
             <a:r>
@@ -2278,7 +2047,7 @@
           <a:bodyPr wrap="square" lIns="0" tIns="0" rIns="0" bIns="0" rtlCol="0" anchor="ctr"/>
           <a:lstStyle/>
           <a:p>
-            <a:pPr indent="0" marL="0">
+            <a:pPr marL="0" indent="0">
               <a:lnSpc>
                 <a:spcPct val="120000"/>
               </a:lnSpc>
@@ -2347,7 +2116,7 @@
           <a:bodyPr wrap="square" lIns="0" tIns="0" rIns="0" bIns="0" rtlCol="0" anchor="ctr"/>
           <a:lstStyle/>
           <a:p>
-            <a:pPr indent="0" marL="0">
+            <a:pPr marL="0" indent="0">
               <a:buNone/>
             </a:pPr>
             <a:r>
@@ -2361,9 +2130,6 @@
               </a:rPr>
               <a:t>Confirm  </a:t>
             </a:r>
-            <a:pPr indent="0" marL="0">
-              <a:buNone/>
-            </a:pPr>
             <a:r>
               <a:rPr lang="en-US" sz="1400" dirty="0">
                 <a:solidFill>
@@ -2427,7 +2193,7 @@
           <a:bodyPr wrap="square" lIns="0" tIns="0" rIns="0" bIns="0" rtlCol="0" anchor="ctr"/>
           <a:lstStyle/>
           <a:p>
-            <a:pPr indent="0" marL="0">
+            <a:pPr marL="0" indent="0">
               <a:buNone/>
             </a:pPr>
             <a:r>
@@ -2441,9 +2207,6 @@
               </a:rPr>
               <a:t>Supply  </a:t>
             </a:r>
-            <a:pPr indent="0" marL="0">
-              <a:buNone/>
-            </a:pPr>
             <a:r>
               <a:rPr lang="en-US" sz="1400" dirty="0">
                 <a:solidFill>
@@ -2507,7 +2270,7 @@
           <a:bodyPr wrap="square" lIns="0" tIns="0" rIns="0" bIns="0" rtlCol="0" anchor="ctr"/>
           <a:lstStyle/>
           <a:p>
-            <a:pPr indent="0" marL="0">
+            <a:pPr marL="0" indent="0">
               <a:buNone/>
             </a:pPr>
             <a:r>
@@ -2521,9 +2284,6 @@
               </a:rPr>
               <a:t>Approve  </a:t>
             </a:r>
-            <a:pPr indent="0" marL="0">
-              <a:buNone/>
-            </a:pPr>
             <a:r>
               <a:rPr lang="en-US" sz="1400" dirty="0">
                 <a:solidFill>
@@ -2555,6 +2315,7 @@
         <a:solidFill>
           <a:srgbClr val="FFFFFF"/>
         </a:solidFill>
+        <a:effectLst/>
       </p:bgPr>
     </p:bg>
     <p:spTree>
@@ -2592,7 +2353,7 @@
           <a:bodyPr wrap="square" lIns="0" tIns="0" rIns="0" bIns="0" rtlCol="0" anchor="ctr"/>
           <a:lstStyle/>
           <a:p>
-            <a:pPr indent="0" marL="0">
+            <a:pPr marL="0" indent="0">
               <a:buNone/>
             </a:pPr>
             <a:r>
@@ -2631,7 +2392,7 @@
           <a:bodyPr wrap="square" lIns="0" tIns="0" rIns="0" bIns="0" rtlCol="0" anchor="ctr"/>
           <a:lstStyle/>
           <a:p>
-            <a:pPr indent="0" marL="0">
+            <a:pPr marL="0" indent="0">
               <a:buNone/>
             </a:pPr>
             <a:r>
@@ -2670,7 +2431,7 @@
           <a:bodyPr wrap="square" lIns="0" tIns="0" rIns="0" bIns="0" rtlCol="0" anchor="ctr"/>
           <a:lstStyle/>
           <a:p>
-            <a:pPr indent="0" marL="0">
+            <a:pPr marL="0" indent="0">
               <a:buNone/>
             </a:pPr>
             <a:r>
@@ -2709,7 +2470,7 @@
           <a:bodyPr wrap="square" lIns="0" tIns="0" rIns="0" bIns="0" rtlCol="0" anchor="ctr"/>
           <a:lstStyle/>
           <a:p>
-            <a:pPr indent="0" marL="0">
+            <a:pPr marL="0" indent="0">
               <a:buNone/>
             </a:pPr>
             <a:r>
@@ -2748,7 +2509,7 @@
           <a:bodyPr wrap="square" lIns="0" tIns="0" rIns="0" bIns="0" rtlCol="0" anchor="ctr"/>
           <a:lstStyle/>
           <a:p>
-            <a:pPr indent="0" marL="0">
+            <a:pPr marL="0" indent="0">
               <a:buNone/>
             </a:pPr>
             <a:r>
@@ -2787,7 +2548,7 @@
           <a:bodyPr wrap="square" lIns="0" tIns="0" rIns="0" bIns="0" rtlCol="0" anchor="ctr"/>
           <a:lstStyle/>
           <a:p>
-            <a:pPr indent="0" marL="0">
+            <a:pPr marL="0" indent="0">
               <a:buNone/>
             </a:pPr>
             <a:r>
@@ -2826,7 +2587,7 @@
           <a:bodyPr wrap="square" lIns="0" tIns="0" rIns="0" bIns="0" rtlCol="0" anchor="ctr"/>
           <a:lstStyle/>
           <a:p>
-            <a:pPr indent="0" marL="0">
+            <a:pPr marL="0" indent="0">
               <a:buNone/>
             </a:pPr>
             <a:r>
@@ -2865,7 +2626,7 @@
           <a:bodyPr wrap="square" lIns="0" tIns="0" rIns="0" bIns="0" rtlCol="0" anchor="ctr"/>
           <a:lstStyle/>
           <a:p>
-            <a:pPr indent="0" marL="0">
+            <a:pPr marL="0" indent="0">
               <a:buNone/>
             </a:pPr>
             <a:r>
@@ -2904,7 +2665,7 @@
           <a:bodyPr wrap="square" lIns="0" tIns="0" rIns="0" bIns="0" rtlCol="0" anchor="ctr"/>
           <a:lstStyle/>
           <a:p>
-            <a:pPr indent="0" marL="0">
+            <a:pPr marL="0" indent="0">
               <a:buNone/>
             </a:pPr>
             <a:r>
@@ -2943,7 +2704,7 @@
           <a:bodyPr wrap="square" lIns="0" tIns="0" rIns="0" bIns="0" rtlCol="0" anchor="ctr"/>
           <a:lstStyle/>
           <a:p>
-            <a:pPr indent="0" marL="0">
+            <a:pPr marL="0" indent="0">
               <a:buNone/>
             </a:pPr>
             <a:r>
@@ -2982,7 +2743,7 @@
           <a:bodyPr wrap="square" lIns="0" tIns="0" rIns="0" bIns="0" rtlCol="0" anchor="ctr"/>
           <a:lstStyle/>
           <a:p>
-            <a:pPr indent="0" marL="0">
+            <a:pPr marL="0" indent="0">
               <a:buNone/>
             </a:pPr>
             <a:r>
@@ -3021,7 +2782,7 @@
           <a:bodyPr wrap="square" lIns="0" tIns="0" rIns="0" bIns="0" rtlCol="0" anchor="ctr"/>
           <a:lstStyle/>
           <a:p>
-            <a:pPr indent="0" marL="0">
+            <a:pPr marL="0" indent="0">
               <a:buNone/>
             </a:pPr>
             <a:r>
@@ -3060,7 +2821,7 @@
           <a:bodyPr wrap="square" lIns="0" tIns="0" rIns="0" bIns="0" rtlCol="0" anchor="ctr"/>
           <a:lstStyle/>
           <a:p>
-            <a:pPr indent="0" marL="0">
+            <a:pPr marL="0" indent="0">
               <a:buNone/>
             </a:pPr>
             <a:r>
@@ -3099,7 +2860,7 @@
           <a:bodyPr wrap="square" lIns="0" tIns="0" rIns="0" bIns="0" rtlCol="0" anchor="ctr"/>
           <a:lstStyle/>
           <a:p>
-            <a:pPr indent="0" marL="0">
+            <a:pPr marL="0" indent="0">
               <a:buNone/>
             </a:pPr>
             <a:r>
@@ -3165,11 +2926,11 @@
           <a:bodyPr wrap="square" lIns="0" tIns="0" rIns="0" bIns="0" rtlCol="0" anchor="ctr"/>
           <a:lstStyle/>
           <a:p>
-            <a:pPr indent="0" marL="0">
-              <a:buNone/>
-            </a:pPr>
-            <a:r>
-              <a:rPr lang="en-US" sz="1000" b="1" spc="150" kern="0" dirty="0">
+            <a:pPr marL="0" indent="0">
+              <a:buNone/>
+            </a:pPr>
+            <a:r>
+              <a:rPr lang="en-US" sz="1000" b="1" kern="0" spc="150" dirty="0">
                 <a:solidFill>
                   <a:srgbClr val="1B7F5A"/>
                 </a:solidFill>
@@ -3204,7 +2965,7 @@
           <a:bodyPr wrap="square" lIns="0" tIns="0" rIns="0" bIns="0" rtlCol="0" anchor="ctr"/>
           <a:lstStyle/>
           <a:p>
-            <a:pPr indent="0" marL="0">
+            <a:pPr marL="0" indent="0">
               <a:buNone/>
             </a:pPr>
             <a:r>
@@ -3243,7 +3004,7 @@
           <a:bodyPr wrap="square" lIns="0" tIns="0" rIns="0" bIns="0" rtlCol="0" anchor="ctr"/>
           <a:lstStyle/>
           <a:p>
-            <a:pPr indent="0" marL="0">
+            <a:pPr marL="0" indent="0">
               <a:lnSpc>
                 <a:spcPct val="115000"/>
               </a:lnSpc>
@@ -3312,11 +3073,11 @@
           <a:bodyPr wrap="square" lIns="0" tIns="0" rIns="0" bIns="0" rtlCol="0" anchor="ctr"/>
           <a:lstStyle/>
           <a:p>
-            <a:pPr indent="0" marL="0">
-              <a:buNone/>
-            </a:pPr>
-            <a:r>
-              <a:rPr lang="en-US" sz="1000" b="1" spc="150" kern="0" dirty="0">
+            <a:pPr marL="0" indent="0">
+              <a:buNone/>
+            </a:pPr>
+            <a:r>
+              <a:rPr lang="en-US" sz="1000" b="1" kern="0" spc="150" dirty="0">
                 <a:solidFill>
                   <a:srgbClr val="B4690E"/>
                 </a:solidFill>
@@ -3351,7 +3112,7 @@
           <a:bodyPr wrap="square" lIns="0" tIns="0" rIns="0" bIns="0" rtlCol="0" anchor="ctr"/>
           <a:lstStyle/>
           <a:p>
-            <a:pPr indent="0" marL="0">
+            <a:pPr marL="0" indent="0">
               <a:buNone/>
             </a:pPr>
             <a:r>
@@ -3390,7 +3151,7 @@
           <a:bodyPr wrap="square" lIns="0" tIns="0" rIns="0" bIns="0" rtlCol="0" anchor="ctr"/>
           <a:lstStyle/>
           <a:p>
-            <a:pPr indent="0" marL="0">
+            <a:pPr marL="0" indent="0">
               <a:lnSpc>
                 <a:spcPct val="115000"/>
               </a:lnSpc>
@@ -3427,6 +3188,7 @@
         <a:solidFill>
           <a:srgbClr val="FFFFFF"/>
         </a:solidFill>
+        <a:effectLst/>
       </p:bgPr>
     </p:bg>
     <p:spTree>
@@ -3464,7 +3226,7 @@
           <a:bodyPr wrap="square" lIns="0" tIns="0" rIns="0" bIns="0" rtlCol="0" anchor="ctr"/>
           <a:lstStyle/>
           <a:p>
-            <a:pPr indent="0" marL="0">
+            <a:pPr marL="0" indent="0">
               <a:buNone/>
             </a:pPr>
             <a:r>
@@ -3503,7 +3265,7 @@
           <a:bodyPr wrap="square" lIns="0" tIns="0" rIns="0" bIns="0" rtlCol="0" anchor="ctr"/>
           <a:lstStyle/>
           <a:p>
-            <a:pPr indent="0" marL="0">
+            <a:pPr marL="0" indent="0">
               <a:buNone/>
             </a:pPr>
             <a:r>
@@ -3567,7 +3329,7 @@
           <a:bodyPr wrap="square" lIns="0" tIns="0" rIns="0" bIns="0" rtlCol="0" anchor="ctr"/>
           <a:lstStyle/>
           <a:p>
-            <a:pPr algn="ctr" indent="0" marL="0">
+            <a:pPr marL="0" indent="0" algn="ctr">
               <a:buNone/>
             </a:pPr>
             <a:r>
@@ -3606,7 +3368,7 @@
           <a:bodyPr wrap="square" lIns="0" tIns="0" rIns="0" bIns="0" rtlCol="0" anchor="ctr"/>
           <a:lstStyle/>
           <a:p>
-            <a:pPr indent="0" marL="0">
+            <a:pPr marL="0" indent="0">
               <a:buNone/>
             </a:pPr>
             <a:r>
@@ -3645,7 +3407,7 @@
           <a:bodyPr wrap="square" lIns="0" tIns="0" rIns="0" bIns="0" rtlCol="0" anchor="ctr"/>
           <a:lstStyle/>
           <a:p>
-            <a:pPr indent="0" marL="0">
+            <a:pPr marL="0" indent="0">
               <a:lnSpc>
                 <a:spcPct val="112000"/>
               </a:lnSpc>
@@ -3712,7 +3474,7 @@
           <a:bodyPr wrap="square" lIns="0" tIns="0" rIns="0" bIns="0" rtlCol="0" anchor="ctr"/>
           <a:lstStyle/>
           <a:p>
-            <a:pPr algn="ctr" indent="0" marL="0">
+            <a:pPr marL="0" indent="0" algn="ctr">
               <a:buNone/>
             </a:pPr>
             <a:r>
@@ -3751,7 +3513,7 @@
           <a:bodyPr wrap="square" lIns="0" tIns="0" rIns="0" bIns="0" rtlCol="0" anchor="ctr"/>
           <a:lstStyle/>
           <a:p>
-            <a:pPr indent="0" marL="0">
+            <a:pPr marL="0" indent="0">
               <a:buNone/>
             </a:pPr>
             <a:r>
@@ -3790,7 +3552,7 @@
           <a:bodyPr wrap="square" lIns="0" tIns="0" rIns="0" bIns="0" rtlCol="0" anchor="ctr"/>
           <a:lstStyle/>
           <a:p>
-            <a:pPr indent="0" marL="0">
+            <a:pPr marL="0" indent="0">
               <a:lnSpc>
                 <a:spcPct val="112000"/>
               </a:lnSpc>
@@ -3857,7 +3619,7 @@
           <a:bodyPr wrap="square" lIns="0" tIns="0" rIns="0" bIns="0" rtlCol="0" anchor="ctr"/>
           <a:lstStyle/>
           <a:p>
-            <a:pPr algn="ctr" indent="0" marL="0">
+            <a:pPr marL="0" indent="0" algn="ctr">
               <a:buNone/>
             </a:pPr>
             <a:r>
@@ -3896,7 +3658,7 @@
           <a:bodyPr wrap="square" lIns="0" tIns="0" rIns="0" bIns="0" rtlCol="0" anchor="ctr"/>
           <a:lstStyle/>
           <a:p>
-            <a:pPr indent="0" marL="0">
+            <a:pPr marL="0" indent="0">
               <a:buNone/>
             </a:pPr>
             <a:r>
@@ -3935,7 +3697,7 @@
           <a:bodyPr wrap="square" lIns="0" tIns="0" rIns="0" bIns="0" rtlCol="0" anchor="ctr"/>
           <a:lstStyle/>
           <a:p>
-            <a:pPr indent="0" marL="0">
+            <a:pPr marL="0" indent="0">
               <a:lnSpc>
                 <a:spcPct val="112000"/>
               </a:lnSpc>
@@ -4002,7 +3764,7 @@
           <a:bodyPr wrap="square" lIns="0" tIns="0" rIns="0" bIns="0" rtlCol="0" anchor="ctr"/>
           <a:lstStyle/>
           <a:p>
-            <a:pPr algn="ctr" indent="0" marL="0">
+            <a:pPr marL="0" indent="0" algn="ctr">
               <a:buNone/>
             </a:pPr>
             <a:r>
@@ -4041,7 +3803,7 @@
           <a:bodyPr wrap="square" lIns="0" tIns="0" rIns="0" bIns="0" rtlCol="0" anchor="ctr"/>
           <a:lstStyle/>
           <a:p>
-            <a:pPr indent="0" marL="0">
+            <a:pPr marL="0" indent="0">
               <a:buNone/>
             </a:pPr>
             <a:r>
@@ -4080,7 +3842,7 @@
           <a:bodyPr wrap="square" lIns="0" tIns="0" rIns="0" bIns="0" rtlCol="0" anchor="ctr"/>
           <a:lstStyle/>
           <a:p>
-            <a:pPr indent="0" marL="0">
+            <a:pPr marL="0" indent="0">
               <a:lnSpc>
                 <a:spcPct val="112000"/>
               </a:lnSpc>
@@ -4117,6 +3879,7 @@
         <a:solidFill>
           <a:srgbClr val="FFFFFF"/>
         </a:solidFill>
+        <a:effectLst/>
       </p:bgPr>
     </p:bg>
     <p:spTree>
@@ -4154,7 +3917,7 @@
           <a:bodyPr wrap="square" lIns="0" tIns="0" rIns="0" bIns="0" rtlCol="0" anchor="ctr"/>
           <a:lstStyle/>
           <a:p>
-            <a:pPr indent="0" marL="0">
+            <a:pPr marL="0" indent="0">
               <a:buNone/>
             </a:pPr>
             <a:r>
@@ -4193,7 +3956,7 @@
           <a:bodyPr wrap="square" lIns="0" tIns="0" rIns="0" bIns="0" rtlCol="0" anchor="ctr"/>
           <a:lstStyle/>
           <a:p>
-            <a:pPr indent="0" marL="0">
+            <a:pPr marL="0" indent="0">
               <a:buNone/>
             </a:pPr>
             <a:r>
@@ -4259,11 +4022,11 @@
           <a:bodyPr wrap="square" lIns="0" tIns="0" rIns="0" bIns="0" rtlCol="0" anchor="ctr"/>
           <a:lstStyle/>
           <a:p>
-            <a:pPr indent="0" marL="0">
-              <a:buNone/>
-            </a:pPr>
-            <a:r>
-              <a:rPr lang="en-US" sz="1000" b="1" spc="150" kern="0" dirty="0">
+            <a:pPr marL="0" indent="0">
+              <a:buNone/>
+            </a:pPr>
+            <a:r>
+              <a:rPr lang="en-US" sz="1000" b="1" kern="0" spc="150" dirty="0">
                 <a:solidFill>
                   <a:srgbClr val="B4690E"/>
                 </a:solidFill>
@@ -4298,7 +4061,7 @@
           <a:bodyPr wrap="square" lIns="0" tIns="0" rIns="0" bIns="0" rtlCol="0" anchor="ctr"/>
           <a:lstStyle/>
           <a:p>
-            <a:pPr indent="0" marL="0">
+            <a:pPr marL="0" indent="0">
               <a:buNone/>
             </a:pPr>
             <a:r>
@@ -4337,7 +4100,7 @@
           <a:bodyPr wrap="square" lIns="0" tIns="0" rIns="0" bIns="0" rtlCol="0" anchor="ctr"/>
           <a:lstStyle/>
           <a:p>
-            <a:pPr indent="0" marL="0">
+            <a:pPr marL="0" indent="0">
               <a:lnSpc>
                 <a:spcPct val="115000"/>
               </a:lnSpc>
@@ -4406,11 +4169,11 @@
           <a:bodyPr wrap="square" lIns="0" tIns="0" rIns="0" bIns="0" rtlCol="0" anchor="ctr"/>
           <a:lstStyle/>
           <a:p>
-            <a:pPr indent="0" marL="0">
-              <a:buNone/>
-            </a:pPr>
-            <a:r>
-              <a:rPr lang="en-US" sz="1000" b="1" spc="150" kern="0" dirty="0">
+            <a:pPr marL="0" indent="0">
+              <a:buNone/>
+            </a:pPr>
+            <a:r>
+              <a:rPr lang="en-US" sz="1000" b="1" kern="0" spc="150" dirty="0">
                 <a:solidFill>
                   <a:srgbClr val="1B7F5A"/>
                 </a:solidFill>
@@ -4445,7 +4208,7 @@
           <a:bodyPr wrap="square" lIns="0" tIns="0" rIns="0" bIns="0" rtlCol="0" anchor="ctr"/>
           <a:lstStyle/>
           <a:p>
-            <a:pPr indent="0" marL="0">
+            <a:pPr marL="0" indent="0">
               <a:buNone/>
             </a:pPr>
             <a:r>
@@ -4484,7 +4247,7 @@
           <a:bodyPr wrap="square" lIns="0" tIns="0" rIns="0" bIns="0" rtlCol="0" anchor="ctr"/>
           <a:lstStyle/>
           <a:p>
-            <a:pPr indent="0" marL="0">
+            <a:pPr marL="0" indent="0">
               <a:lnSpc>
                 <a:spcPct val="115000"/>
               </a:lnSpc>
@@ -4553,7 +4316,7 @@
           <a:bodyPr wrap="square" lIns="0" tIns="0" rIns="0" bIns="0" rtlCol="0" anchor="ctr"/>
           <a:lstStyle/>
           <a:p>
-            <a:pPr indent="0" marL="0">
+            <a:pPr marL="0" indent="0">
               <a:buNone/>
             </a:pPr>
             <a:r>
@@ -4592,7 +4355,7 @@
           <a:bodyPr wrap="square" lIns="0" tIns="0" rIns="0" bIns="0" rtlCol="0" anchor="ctr"/>
           <a:lstStyle/>
           <a:p>
-            <a:pPr indent="0" marL="0">
+            <a:pPr marL="0" indent="0">
               <a:lnSpc>
                 <a:spcPct val="115000"/>
               </a:lnSpc>
@@ -4629,6 +4392,7 @@
         <a:solidFill>
           <a:srgbClr val="FFFFFF"/>
         </a:solidFill>
+        <a:effectLst/>
       </p:bgPr>
     </p:bg>
     <p:spTree>
@@ -4666,7 +4430,7 @@
           <a:bodyPr wrap="square" lIns="0" tIns="0" rIns="0" bIns="0" rtlCol="0" anchor="ctr"/>
           <a:lstStyle/>
           <a:p>
-            <a:pPr indent="0" marL="0">
+            <a:pPr marL="0" indent="0">
               <a:buNone/>
             </a:pPr>
             <a:r>
@@ -4705,7 +4469,7 @@
           <a:bodyPr wrap="square" lIns="0" tIns="0" rIns="0" bIns="0" rtlCol="0" anchor="ctr"/>
           <a:lstStyle/>
           <a:p>
-            <a:pPr indent="0" marL="0">
+            <a:pPr marL="0" indent="0">
               <a:buNone/>
             </a:pPr>
             <a:r>
@@ -4796,7 +4560,7 @@
           <a:bodyPr wrap="square" lIns="0" tIns="0" rIns="0" bIns="0" rtlCol="0" anchor="ctr"/>
           <a:lstStyle/>
           <a:p>
-            <a:pPr algn="ctr" indent="0" marL="0">
+            <a:pPr marL="0" indent="0" algn="ctr">
               <a:buNone/>
             </a:pPr>
             <a:r>
@@ -4835,7 +4599,7 @@
           <a:bodyPr wrap="square" lIns="0" tIns="0" rIns="0" bIns="0" rtlCol="0" anchor="ctr"/>
           <a:lstStyle/>
           <a:p>
-            <a:pPr algn="ctr" indent="0" marL="0">
+            <a:pPr marL="0" indent="0" algn="ctr">
               <a:buNone/>
             </a:pPr>
             <a:r>
@@ -4874,7 +4638,7 @@
           <a:bodyPr wrap="square" lIns="0" tIns="0" rIns="0" bIns="0" rtlCol="0" anchor="ctr"/>
           <a:lstStyle/>
           <a:p>
-            <a:pPr algn="ctr" indent="0" marL="0">
+            <a:pPr marL="0" indent="0" algn="ctr">
               <a:buNone/>
             </a:pPr>
             <a:r>
@@ -4913,7 +4677,7 @@
           <a:bodyPr wrap="square" lIns="0" tIns="0" rIns="0" bIns="0" rtlCol="0" anchor="ctr"/>
           <a:lstStyle/>
           <a:p>
-            <a:pPr algn="ctr" indent="0" marL="0">
+            <a:pPr marL="0" indent="0" algn="ctr">
               <a:lnSpc>
                 <a:spcPct val="110000"/>
               </a:lnSpc>
@@ -5007,7 +4771,7 @@
           <a:bodyPr wrap="square" lIns="0" tIns="0" rIns="0" bIns="0" rtlCol="0" anchor="ctr"/>
           <a:lstStyle/>
           <a:p>
-            <a:pPr algn="ctr" indent="0" marL="0">
+            <a:pPr marL="0" indent="0" algn="ctr">
               <a:buNone/>
             </a:pPr>
             <a:r>
@@ -5046,7 +4810,7 @@
           <a:bodyPr wrap="square" lIns="0" tIns="0" rIns="0" bIns="0" rtlCol="0" anchor="ctr"/>
           <a:lstStyle/>
           <a:p>
-            <a:pPr algn="ctr" indent="0" marL="0">
+            <a:pPr marL="0" indent="0" algn="ctr">
               <a:buNone/>
             </a:pPr>
             <a:r>
@@ -5085,7 +4849,7 @@
           <a:bodyPr wrap="square" lIns="0" tIns="0" rIns="0" bIns="0" rtlCol="0" anchor="ctr"/>
           <a:lstStyle/>
           <a:p>
-            <a:pPr algn="ctr" indent="0" marL="0">
+            <a:pPr marL="0" indent="0" algn="ctr">
               <a:buNone/>
             </a:pPr>
             <a:r>
@@ -5124,7 +4888,7 @@
           <a:bodyPr wrap="square" lIns="0" tIns="0" rIns="0" bIns="0" rtlCol="0" anchor="ctr"/>
           <a:lstStyle/>
           <a:p>
-            <a:pPr algn="ctr" indent="0" marL="0">
+            <a:pPr marL="0" indent="0" algn="ctr">
               <a:lnSpc>
                 <a:spcPct val="110000"/>
               </a:lnSpc>
@@ -5218,7 +4982,7 @@
           <a:bodyPr wrap="square" lIns="0" tIns="0" rIns="0" bIns="0" rtlCol="0" anchor="ctr"/>
           <a:lstStyle/>
           <a:p>
-            <a:pPr algn="ctr" indent="0" marL="0">
+            <a:pPr marL="0" indent="0" algn="ctr">
               <a:buNone/>
             </a:pPr>
             <a:r>
@@ -5257,7 +5021,7 @@
           <a:bodyPr wrap="square" lIns="0" tIns="0" rIns="0" bIns="0" rtlCol="0" anchor="ctr"/>
           <a:lstStyle/>
           <a:p>
-            <a:pPr algn="ctr" indent="0" marL="0">
+            <a:pPr marL="0" indent="0" algn="ctr">
               <a:buNone/>
             </a:pPr>
             <a:r>
@@ -5296,7 +5060,7 @@
           <a:bodyPr wrap="square" lIns="0" tIns="0" rIns="0" bIns="0" rtlCol="0" anchor="ctr"/>
           <a:lstStyle/>
           <a:p>
-            <a:pPr algn="ctr" indent="0" marL="0">
+            <a:pPr marL="0" indent="0" algn="ctr">
               <a:buNone/>
             </a:pPr>
             <a:r>
@@ -5335,7 +5099,7 @@
           <a:bodyPr wrap="square" lIns="0" tIns="0" rIns="0" bIns="0" rtlCol="0" anchor="ctr"/>
           <a:lstStyle/>
           <a:p>
-            <a:pPr algn="ctr" indent="0" marL="0">
+            <a:pPr marL="0" indent="0" algn="ctr">
               <a:lnSpc>
                 <a:spcPct val="110000"/>
               </a:lnSpc>
@@ -5429,7 +5193,7 @@
           <a:bodyPr wrap="square" lIns="0" tIns="0" rIns="0" bIns="0" rtlCol="0" anchor="ctr"/>
           <a:lstStyle/>
           <a:p>
-            <a:pPr algn="ctr" indent="0" marL="0">
+            <a:pPr marL="0" indent="0" algn="ctr">
               <a:buNone/>
             </a:pPr>
             <a:r>
@@ -5468,7 +5232,7 @@
           <a:bodyPr wrap="square" lIns="0" tIns="0" rIns="0" bIns="0" rtlCol="0" anchor="ctr"/>
           <a:lstStyle/>
           <a:p>
-            <a:pPr algn="ctr" indent="0" marL="0">
+            <a:pPr marL="0" indent="0" algn="ctr">
               <a:buNone/>
             </a:pPr>
             <a:r>
@@ -5507,7 +5271,7 @@
           <a:bodyPr wrap="square" lIns="0" tIns="0" rIns="0" bIns="0" rtlCol="0" anchor="ctr"/>
           <a:lstStyle/>
           <a:p>
-            <a:pPr algn="ctr" indent="0" marL="0">
+            <a:pPr marL="0" indent="0" algn="ctr">
               <a:buNone/>
             </a:pPr>
             <a:r>
@@ -5546,7 +5310,7 @@
           <a:bodyPr wrap="square" lIns="0" tIns="0" rIns="0" bIns="0" rtlCol="0" anchor="ctr"/>
           <a:lstStyle/>
           <a:p>
-            <a:pPr algn="ctr" indent="0" marL="0">
+            <a:pPr marL="0" indent="0" algn="ctr">
               <a:lnSpc>
                 <a:spcPct val="110000"/>
               </a:lnSpc>
@@ -5640,7 +5404,7 @@
           <a:bodyPr wrap="square" lIns="0" tIns="0" rIns="0" bIns="0" rtlCol="0" anchor="ctr"/>
           <a:lstStyle/>
           <a:p>
-            <a:pPr algn="ctr" indent="0" marL="0">
+            <a:pPr marL="0" indent="0" algn="ctr">
               <a:buNone/>
             </a:pPr>
             <a:r>
@@ -5679,7 +5443,7 @@
           <a:bodyPr wrap="square" lIns="0" tIns="0" rIns="0" bIns="0" rtlCol="0" anchor="ctr"/>
           <a:lstStyle/>
           <a:p>
-            <a:pPr algn="ctr" indent="0" marL="0">
+            <a:pPr marL="0" indent="0" algn="ctr">
               <a:buNone/>
             </a:pPr>
             <a:r>
@@ -5718,7 +5482,7 @@
           <a:bodyPr wrap="square" lIns="0" tIns="0" rIns="0" bIns="0" rtlCol="0" anchor="ctr"/>
           <a:lstStyle/>
           <a:p>
-            <a:pPr algn="ctr" indent="0" marL="0">
+            <a:pPr marL="0" indent="0" algn="ctr">
               <a:buNone/>
             </a:pPr>
             <a:r>
@@ -5757,7 +5521,7 @@
           <a:bodyPr wrap="square" lIns="0" tIns="0" rIns="0" bIns="0" rtlCol="0" anchor="ctr"/>
           <a:lstStyle/>
           <a:p>
-            <a:pPr algn="ctr" indent="0" marL="0">
+            <a:pPr marL="0" indent="0" algn="ctr">
               <a:lnSpc>
                 <a:spcPct val="110000"/>
               </a:lnSpc>
@@ -5799,7 +5563,7 @@
           <a:bodyPr wrap="square" lIns="0" tIns="0" rIns="0" bIns="0" rtlCol="0" anchor="ctr"/>
           <a:lstStyle/>
           <a:p>
-            <a:pPr indent="0" marL="0">
+            <a:pPr marL="0" indent="0">
               <a:buNone/>
             </a:pPr>
             <a:r>
@@ -5833,6 +5597,7 @@
         <a:solidFill>
           <a:srgbClr val="FFFFFF"/>
         </a:solidFill>
+        <a:effectLst/>
       </p:bgPr>
     </p:bg>
     <p:spTree>
@@ -5870,7 +5635,7 @@
           <a:bodyPr wrap="square" lIns="0" tIns="0" rIns="0" bIns="0" rtlCol="0" anchor="ctr"/>
           <a:lstStyle/>
           <a:p>
-            <a:pPr indent="0" marL="0">
+            <a:pPr marL="0" indent="0">
               <a:buNone/>
             </a:pPr>
             <a:r>
@@ -5909,7 +5674,7 @@
           <a:bodyPr wrap="square" lIns="0" tIns="0" rIns="0" bIns="0" rtlCol="0" anchor="ctr"/>
           <a:lstStyle/>
           <a:p>
-            <a:pPr indent="0" marL="0">
+            <a:pPr marL="0" indent="0">
               <a:buNone/>
             </a:pPr>
             <a:r>
@@ -5975,7 +5740,7 @@
           <a:bodyPr wrap="square" lIns="0" tIns="0" rIns="0" bIns="0" rtlCol="0" anchor="ctr"/>
           <a:lstStyle/>
           <a:p>
-            <a:pPr indent="0" marL="0">
+            <a:pPr marL="0" indent="0">
               <a:buNone/>
             </a:pPr>
             <a:r>
@@ -6014,7 +5779,7 @@
           <a:bodyPr wrap="square" lIns="0" tIns="0" rIns="0" bIns="0" rtlCol="0" anchor="ctr"/>
           <a:lstStyle/>
           <a:p>
-            <a:pPr indent="0" marL="0">
+            <a:pPr marL="0" indent="0">
               <a:buNone/>
             </a:pPr>
             <a:r>
@@ -6031,7 +5796,7 @@
             <a:endParaRPr lang="en-US" sz="1400" dirty="0"/>
           </a:p>
           <a:p>
-            <a:pPr indent="0" marL="0">
+            <a:pPr marL="0" indent="0">
               <a:buNone/>
             </a:pPr>
             <a:r>
@@ -6070,7 +5835,7 @@
           <a:bodyPr wrap="square" lIns="0" tIns="0" rIns="0" bIns="0" rtlCol="0" anchor="ctr"/>
           <a:lstStyle/>
           <a:p>
-            <a:pPr indent="0" marL="0">
+            <a:pPr marL="0" indent="0">
               <a:buNone/>
             </a:pPr>
             <a:r>
@@ -6109,7 +5874,7 @@
           <a:bodyPr wrap="square" lIns="0" tIns="0" rIns="0" bIns="0" rtlCol="0" anchor="ctr"/>
           <a:lstStyle/>
           <a:p>
-            <a:pPr indent="0" marL="0">
+            <a:pPr marL="0" indent="0">
               <a:lnSpc>
                 <a:spcPct val="110000"/>
               </a:lnSpc>
@@ -6178,7 +5943,7 @@
           <a:bodyPr wrap="square" lIns="0" tIns="0" rIns="0" bIns="0" rtlCol="0" anchor="ctr"/>
           <a:lstStyle/>
           <a:p>
-            <a:pPr indent="0" marL="0">
+            <a:pPr marL="0" indent="0">
               <a:buNone/>
             </a:pPr>
             <a:r>
@@ -6217,7 +5982,7 @@
           <a:bodyPr wrap="square" lIns="0" tIns="0" rIns="0" bIns="0" rtlCol="0" anchor="ctr"/>
           <a:lstStyle/>
           <a:p>
-            <a:pPr indent="0" marL="0">
+            <a:pPr marL="0" indent="0">
               <a:buNone/>
             </a:pPr>
             <a:r>
@@ -6234,7 +5999,7 @@
             <a:endParaRPr lang="en-US" sz="1400" dirty="0"/>
           </a:p>
           <a:p>
-            <a:pPr indent="0" marL="0">
+            <a:pPr marL="0" indent="0">
               <a:buNone/>
             </a:pPr>
             <a:r>
@@ -6273,7 +6038,7 @@
           <a:bodyPr wrap="square" lIns="0" tIns="0" rIns="0" bIns="0" rtlCol="0" anchor="ctr"/>
           <a:lstStyle/>
           <a:p>
-            <a:pPr indent="0" marL="0">
+            <a:pPr marL="0" indent="0">
               <a:buNone/>
             </a:pPr>
             <a:r>
@@ -6312,7 +6077,7 @@
           <a:bodyPr wrap="square" lIns="0" tIns="0" rIns="0" bIns="0" rtlCol="0" anchor="ctr"/>
           <a:lstStyle/>
           <a:p>
-            <a:pPr indent="0" marL="0">
+            <a:pPr marL="0" indent="0">
               <a:lnSpc>
                 <a:spcPct val="110000"/>
               </a:lnSpc>
@@ -6381,7 +6146,7 @@
           <a:bodyPr wrap="square" lIns="0" tIns="0" rIns="0" bIns="0" rtlCol="0" anchor="ctr"/>
           <a:lstStyle/>
           <a:p>
-            <a:pPr indent="0" marL="0">
+            <a:pPr marL="0" indent="0">
               <a:buNone/>
             </a:pPr>
             <a:r>
@@ -6420,7 +6185,7 @@
           <a:bodyPr wrap="square" lIns="0" tIns="0" rIns="0" bIns="0" rtlCol="0" anchor="ctr"/>
           <a:lstStyle/>
           <a:p>
-            <a:pPr indent="0" marL="0">
+            <a:pPr marL="0" indent="0">
               <a:buNone/>
             </a:pPr>
             <a:r>
@@ -6437,7 +6202,7 @@
             <a:endParaRPr lang="en-US" sz="1400" dirty="0"/>
           </a:p>
           <a:p>
-            <a:pPr indent="0" marL="0">
+            <a:pPr marL="0" indent="0">
               <a:buNone/>
             </a:pPr>
             <a:r>
@@ -6476,7 +6241,7 @@
           <a:bodyPr wrap="square" lIns="0" tIns="0" rIns="0" bIns="0" rtlCol="0" anchor="ctr"/>
           <a:lstStyle/>
           <a:p>
-            <a:pPr indent="0" marL="0">
+            <a:pPr marL="0" indent="0">
               <a:buNone/>
             </a:pPr>
             <a:r>
@@ -6515,7 +6280,7 @@
           <a:bodyPr wrap="square" lIns="0" tIns="0" rIns="0" bIns="0" rtlCol="0" anchor="ctr"/>
           <a:lstStyle/>
           <a:p>
-            <a:pPr indent="0" marL="0">
+            <a:pPr marL="0" indent="0">
               <a:lnSpc>
                 <a:spcPct val="110000"/>
               </a:lnSpc>
@@ -6584,7 +6349,7 @@
           <a:bodyPr wrap="square" lIns="0" tIns="0" rIns="0" bIns="0" rtlCol="0" anchor="ctr"/>
           <a:lstStyle/>
           <a:p>
-            <a:pPr indent="0" marL="0">
+            <a:pPr marL="0" indent="0">
               <a:buNone/>
             </a:pPr>
             <a:r>
@@ -6623,7 +6388,7 @@
           <a:bodyPr wrap="square" lIns="0" tIns="0" rIns="0" bIns="0" rtlCol="0" anchor="ctr"/>
           <a:lstStyle/>
           <a:p>
-            <a:pPr indent="0" marL="0">
+            <a:pPr marL="0" indent="0">
               <a:buNone/>
             </a:pPr>
             <a:r>
@@ -6640,7 +6405,7 @@
             <a:endParaRPr lang="en-US" sz="1400" dirty="0"/>
           </a:p>
           <a:p>
-            <a:pPr indent="0" marL="0">
+            <a:pPr marL="0" indent="0">
               <a:buNone/>
             </a:pPr>
             <a:r>
@@ -6679,7 +6444,7 @@
           <a:bodyPr wrap="square" lIns="0" tIns="0" rIns="0" bIns="0" rtlCol="0" anchor="ctr"/>
           <a:lstStyle/>
           <a:p>
-            <a:pPr indent="0" marL="0">
+            <a:pPr marL="0" indent="0">
               <a:buNone/>
             </a:pPr>
             <a:r>
@@ -6718,7 +6483,7 @@
           <a:bodyPr wrap="square" lIns="0" tIns="0" rIns="0" bIns="0" rtlCol="0" anchor="ctr"/>
           <a:lstStyle/>
           <a:p>
-            <a:pPr indent="0" marL="0">
+            <a:pPr marL="0" indent="0">
               <a:lnSpc>
                 <a:spcPct val="110000"/>
               </a:lnSpc>
@@ -6787,7 +6552,7 @@
           <a:bodyPr wrap="square" lIns="0" tIns="0" rIns="0" bIns="0" rtlCol="0" anchor="ctr"/>
           <a:lstStyle/>
           <a:p>
-            <a:pPr indent="0" marL="0">
+            <a:pPr marL="0" indent="0">
               <a:buNone/>
             </a:pPr>
             <a:r>
@@ -6826,7 +6591,7 @@
           <a:bodyPr wrap="square" lIns="0" tIns="0" rIns="0" bIns="0" rtlCol="0" anchor="ctr"/>
           <a:lstStyle/>
           <a:p>
-            <a:pPr indent="0" marL="0">
+            <a:pPr marL="0" indent="0">
               <a:lnSpc>
                 <a:spcPct val="115000"/>
               </a:lnSpc>
@@ -6895,7 +6660,7 @@
           <a:bodyPr wrap="square" lIns="0" tIns="0" rIns="0" bIns="0" rtlCol="0" anchor="ctr"/>
           <a:lstStyle/>
           <a:p>
-            <a:pPr indent="0" marL="0">
+            <a:pPr marL="0" indent="0">
               <a:buNone/>
             </a:pPr>
             <a:r>
@@ -6934,7 +6699,7 @@
           <a:bodyPr wrap="square" lIns="0" tIns="0" rIns="0" bIns="0" rtlCol="0" anchor="ctr"/>
           <a:lstStyle/>
           <a:p>
-            <a:pPr indent="0" marL="0">
+            <a:pPr marL="0" indent="0">
               <a:lnSpc>
                 <a:spcPct val="115000"/>
               </a:lnSpc>
@@ -6971,6 +6736,7 @@
         <a:solidFill>
           <a:srgbClr val="FFFFFF"/>
         </a:solidFill>
+        <a:effectLst/>
       </p:bgPr>
     </p:bg>
     <p:spTree>
@@ -7008,7 +6774,7 @@
           <a:bodyPr wrap="square" lIns="0" tIns="0" rIns="0" bIns="0" rtlCol="0" anchor="ctr"/>
           <a:lstStyle/>
           <a:p>
-            <a:pPr indent="0" marL="0">
+            <a:pPr marL="0" indent="0">
               <a:buNone/>
             </a:pPr>
             <a:r>
@@ -7047,7 +6813,7 @@
           <a:bodyPr wrap="square" lIns="0" tIns="0" rIns="0" bIns="0" rtlCol="0" anchor="ctr"/>
           <a:lstStyle/>
           <a:p>
-            <a:pPr indent="0" marL="0">
+            <a:pPr marL="0" indent="0">
               <a:buNone/>
             </a:pPr>
             <a:r>
@@ -7113,11 +6879,11 @@
           <a:bodyPr wrap="square" lIns="0" tIns="0" rIns="0" bIns="0" rtlCol="0" anchor="ctr"/>
           <a:lstStyle/>
           <a:p>
-            <a:pPr indent="0" marL="0">
-              <a:buNone/>
-            </a:pPr>
-            <a:r>
-              <a:rPr lang="en-US" sz="1000" b="1" spc="150" kern="0" dirty="0">
+            <a:pPr marL="0" indent="0">
+              <a:buNone/>
+            </a:pPr>
+            <a:r>
+              <a:rPr lang="en-US" sz="1000" b="1" kern="0" spc="150" dirty="0">
                 <a:solidFill>
                   <a:srgbClr val="1E2761"/>
                 </a:solidFill>
@@ -7152,7 +6918,7 @@
           <a:bodyPr wrap="square" lIns="0" tIns="0" rIns="0" bIns="0" rtlCol="0" anchor="ctr"/>
           <a:lstStyle/>
           <a:p>
-            <a:pPr indent="0" marL="0">
+            <a:pPr marL="0" indent="0">
               <a:buNone/>
             </a:pPr>
             <a:r>
@@ -7191,7 +6957,7 @@
           <a:bodyPr wrap="square" lIns="0" tIns="0" rIns="0" bIns="0" rtlCol="0" anchor="ctr"/>
           <a:lstStyle/>
           <a:p>
-            <a:pPr indent="0" marL="0">
+            <a:pPr marL="0" indent="0">
               <a:lnSpc>
                 <a:spcPct val="115000"/>
               </a:lnSpc>
@@ -7260,11 +7026,11 @@
           <a:bodyPr wrap="square" lIns="0" tIns="0" rIns="0" bIns="0" rtlCol="0" anchor="ctr"/>
           <a:lstStyle/>
           <a:p>
-            <a:pPr indent="0" marL="0">
-              <a:buNone/>
-            </a:pPr>
-            <a:r>
-              <a:rPr lang="en-US" sz="1000" b="1" spc="150" kern="0" dirty="0">
+            <a:pPr marL="0" indent="0">
+              <a:buNone/>
+            </a:pPr>
+            <a:r>
+              <a:rPr lang="en-US" sz="1000" b="1" kern="0" spc="150" dirty="0">
                 <a:solidFill>
                   <a:srgbClr val="1E2761"/>
                 </a:solidFill>
@@ -7299,7 +7065,7 @@
           <a:bodyPr wrap="square" lIns="0" tIns="0" rIns="0" bIns="0" rtlCol="0" anchor="ctr"/>
           <a:lstStyle/>
           <a:p>
-            <a:pPr indent="0" marL="0">
+            <a:pPr marL="0" indent="0">
               <a:buNone/>
             </a:pPr>
             <a:r>
@@ -7338,7 +7104,7 @@
           <a:bodyPr wrap="square" lIns="0" tIns="0" rIns="0" bIns="0" rtlCol="0" anchor="ctr"/>
           <a:lstStyle/>
           <a:p>
-            <a:pPr indent="0" marL="0">
+            <a:pPr marL="0" indent="0">
               <a:lnSpc>
                 <a:spcPct val="115000"/>
               </a:lnSpc>
@@ -7407,11 +7173,11 @@
           <a:bodyPr wrap="square" lIns="0" tIns="0" rIns="0" bIns="0" rtlCol="0" anchor="ctr"/>
           <a:lstStyle/>
           <a:p>
-            <a:pPr indent="0" marL="0">
-              <a:buNone/>
-            </a:pPr>
-            <a:r>
-              <a:rPr lang="en-US" sz="1000" b="1" spc="150" kern="0" dirty="0">
+            <a:pPr marL="0" indent="0">
+              <a:buNone/>
+            </a:pPr>
+            <a:r>
+              <a:rPr lang="en-US" sz="1000" b="1" kern="0" spc="150" dirty="0">
                 <a:solidFill>
                   <a:srgbClr val="1B7F5A"/>
                 </a:solidFill>
@@ -7446,7 +7212,7 @@
           <a:bodyPr wrap="square" lIns="0" tIns="0" rIns="0" bIns="0" rtlCol="0" anchor="ctr"/>
           <a:lstStyle/>
           <a:p>
-            <a:pPr indent="0" marL="0">
+            <a:pPr marL="0" indent="0">
               <a:buNone/>
             </a:pPr>
             <a:r>
@@ -7485,7 +7251,7 @@
           <a:bodyPr wrap="square" lIns="0" tIns="0" rIns="0" bIns="0" rtlCol="0" anchor="ctr"/>
           <a:lstStyle/>
           <a:p>
-            <a:pPr indent="0" marL="0">
+            <a:pPr marL="0" indent="0">
               <a:lnSpc>
                 <a:spcPct val="115000"/>
               </a:lnSpc>
@@ -7554,7 +7320,7 @@
           <a:bodyPr wrap="square" lIns="0" tIns="0" rIns="0" bIns="0" rtlCol="0" anchor="ctr"/>
           <a:lstStyle/>
           <a:p>
-            <a:pPr indent="0" marL="0">
+            <a:pPr marL="0" indent="0">
               <a:buNone/>
             </a:pPr>
             <a:r>
@@ -7593,7 +7359,7 @@
           <a:bodyPr wrap="square" lIns="0" tIns="0" rIns="0" bIns="0" rtlCol="0" anchor="ctr"/>
           <a:lstStyle/>
           <a:p>
-            <a:pPr indent="0" marL="0">
+            <a:pPr marL="0" indent="0">
               <a:lnSpc>
                 <a:spcPct val="115000"/>
               </a:lnSpc>
@@ -7630,6 +7396,7 @@
         <a:solidFill>
           <a:srgbClr val="FFFFFF"/>
         </a:solidFill>
+        <a:effectLst/>
       </p:bgPr>
     </p:bg>
     <p:spTree>
@@ -7667,7 +7434,7 @@
           <a:bodyPr wrap="square" lIns="0" tIns="0" rIns="0" bIns="0" rtlCol="0" anchor="ctr"/>
           <a:lstStyle/>
           <a:p>
-            <a:pPr indent="0" marL="0">
+            <a:pPr marL="0" indent="0">
               <a:buNone/>
             </a:pPr>
             <a:r>
@@ -7706,7 +7473,7 @@
           <a:bodyPr wrap="square" lIns="0" tIns="0" rIns="0" bIns="0" rtlCol="0" anchor="ctr"/>
           <a:lstStyle/>
           <a:p>
-            <a:pPr indent="0" marL="0">
+            <a:pPr marL="0" indent="0">
               <a:buNone/>
             </a:pPr>
             <a:r>
@@ -7770,7 +7537,7 @@
           <a:bodyPr wrap="square" lIns="0" tIns="0" rIns="0" bIns="0" rtlCol="0" anchor="ctr"/>
           <a:lstStyle/>
           <a:p>
-            <a:pPr algn="ctr" indent="0" marL="0">
+            <a:pPr marL="0" indent="0" algn="ctr">
               <a:buNone/>
             </a:pPr>
             <a:r>
@@ -7809,7 +7576,7 @@
           <a:bodyPr wrap="square" lIns="0" tIns="0" rIns="0" bIns="0" rtlCol="0" anchor="ctr"/>
           <a:lstStyle/>
           <a:p>
-            <a:pPr indent="0" marL="0">
+            <a:pPr marL="0" indent="0">
               <a:buNone/>
             </a:pPr>
             <a:r>
@@ -7848,7 +7615,7 @@
           <a:bodyPr wrap="square" lIns="0" tIns="0" rIns="0" bIns="0" rtlCol="0" anchor="ctr"/>
           <a:lstStyle/>
           <a:p>
-            <a:pPr indent="0" marL="0">
+            <a:pPr marL="0" indent="0">
               <a:lnSpc>
                 <a:spcPct val="112000"/>
               </a:lnSpc>
@@ -7915,7 +7682,7 @@
           <a:bodyPr wrap="square" lIns="0" tIns="0" rIns="0" bIns="0" rtlCol="0" anchor="ctr"/>
           <a:lstStyle/>
           <a:p>
-            <a:pPr algn="ctr" indent="0" marL="0">
+            <a:pPr marL="0" indent="0" algn="ctr">
               <a:buNone/>
             </a:pPr>
             <a:r>
@@ -7954,7 +7721,7 @@
           <a:bodyPr wrap="square" lIns="0" tIns="0" rIns="0" bIns="0" rtlCol="0" anchor="ctr"/>
           <a:lstStyle/>
           <a:p>
-            <a:pPr indent="0" marL="0">
+            <a:pPr marL="0" indent="0">
               <a:buNone/>
             </a:pPr>
             <a:r>
@@ -7993,7 +7760,7 @@
           <a:bodyPr wrap="square" lIns="0" tIns="0" rIns="0" bIns="0" rtlCol="0" anchor="ctr"/>
           <a:lstStyle/>
           <a:p>
-            <a:pPr indent="0" marL="0">
+            <a:pPr marL="0" indent="0">
               <a:lnSpc>
                 <a:spcPct val="112000"/>
               </a:lnSpc>
@@ -8060,7 +7827,7 @@
           <a:bodyPr wrap="square" lIns="0" tIns="0" rIns="0" bIns="0" rtlCol="0" anchor="ctr"/>
           <a:lstStyle/>
           <a:p>
-            <a:pPr algn="ctr" indent="0" marL="0">
+            <a:pPr marL="0" indent="0" algn="ctr">
               <a:buNone/>
             </a:pPr>
             <a:r>
@@ -8099,7 +7866,7 @@
           <a:bodyPr wrap="square" lIns="0" tIns="0" rIns="0" bIns="0" rtlCol="0" anchor="ctr"/>
           <a:lstStyle/>
           <a:p>
-            <a:pPr indent="0" marL="0">
+            <a:pPr marL="0" indent="0">
               <a:buNone/>
             </a:pPr>
             <a:r>
@@ -8138,7 +7905,7 @@
           <a:bodyPr wrap="square" lIns="0" tIns="0" rIns="0" bIns="0" rtlCol="0" anchor="ctr"/>
           <a:lstStyle/>
           <a:p>
-            <a:pPr indent="0" marL="0">
+            <a:pPr marL="0" indent="0">
               <a:lnSpc>
                 <a:spcPct val="112000"/>
               </a:lnSpc>
@@ -8205,7 +7972,7 @@
           <a:bodyPr wrap="square" lIns="0" tIns="0" rIns="0" bIns="0" rtlCol="0" anchor="ctr"/>
           <a:lstStyle/>
           <a:p>
-            <a:pPr algn="ctr" indent="0" marL="0">
+            <a:pPr marL="0" indent="0" algn="ctr">
               <a:buNone/>
             </a:pPr>
             <a:r>
@@ -8244,7 +8011,7 @@
           <a:bodyPr wrap="square" lIns="0" tIns="0" rIns="0" bIns="0" rtlCol="0" anchor="ctr"/>
           <a:lstStyle/>
           <a:p>
-            <a:pPr indent="0" marL="0">
+            <a:pPr marL="0" indent="0">
               <a:buNone/>
             </a:pPr>
             <a:r>
@@ -8283,7 +8050,7 @@
           <a:bodyPr wrap="square" lIns="0" tIns="0" rIns="0" bIns="0" rtlCol="0" anchor="ctr"/>
           <a:lstStyle/>
           <a:p>
-            <a:pPr indent="0" marL="0">
+            <a:pPr marL="0" indent="0">
               <a:lnSpc>
                 <a:spcPct val="112000"/>
               </a:lnSpc>
@@ -8320,6 +8087,7 @@
         <a:solidFill>
           <a:srgbClr val="FFFFFF"/>
         </a:solidFill>
+        <a:effectLst/>
       </p:bgPr>
     </p:bg>
     <p:spTree>
@@ -8357,7 +8125,7 @@
           <a:bodyPr wrap="square" lIns="0" tIns="0" rIns="0" bIns="0" rtlCol="0" anchor="ctr"/>
           <a:lstStyle/>
           <a:p>
-            <a:pPr indent="0" marL="0">
+            <a:pPr marL="0" indent="0">
               <a:buNone/>
             </a:pPr>
             <a:r>
@@ -8396,7 +8164,7 @@
           <a:bodyPr wrap="square" lIns="0" tIns="0" rIns="0" bIns="0" rtlCol="0" anchor="ctr"/>
           <a:lstStyle/>
           <a:p>
-            <a:pPr indent="0" marL="0">
+            <a:pPr marL="0" indent="0">
               <a:buNone/>
             </a:pPr>
             <a:r>
@@ -8462,11 +8230,11 @@
           <a:bodyPr wrap="square" lIns="0" tIns="0" rIns="0" bIns="0" rtlCol="0" anchor="ctr"/>
           <a:lstStyle/>
           <a:p>
-            <a:pPr indent="0" marL="0">
-              <a:buNone/>
-            </a:pPr>
-            <a:r>
-              <a:rPr lang="en-US" sz="1000" b="1" spc="150" kern="0" dirty="0">
+            <a:pPr marL="0" indent="0">
+              <a:buNone/>
+            </a:pPr>
+            <a:r>
+              <a:rPr lang="en-US" sz="1000" b="1" kern="0" spc="150" dirty="0">
                 <a:solidFill>
                   <a:srgbClr val="B4690E"/>
                 </a:solidFill>
@@ -8501,7 +8269,7 @@
           <a:bodyPr wrap="square" lIns="0" tIns="0" rIns="0" bIns="0" rtlCol="0" anchor="ctr"/>
           <a:lstStyle/>
           <a:p>
-            <a:pPr indent="0" marL="0">
+            <a:pPr marL="0" indent="0">
               <a:buNone/>
             </a:pPr>
             <a:r>
@@ -8540,7 +8308,7 @@
           <a:bodyPr wrap="square" lIns="0" tIns="0" rIns="0" bIns="0" rtlCol="0" anchor="ctr"/>
           <a:lstStyle/>
           <a:p>
-            <a:pPr indent="0" marL="0">
+            <a:pPr marL="0" indent="0">
               <a:lnSpc>
                 <a:spcPct val="115000"/>
               </a:lnSpc>
@@ -8609,11 +8377,11 @@
           <a:bodyPr wrap="square" lIns="0" tIns="0" rIns="0" bIns="0" rtlCol="0" anchor="ctr"/>
           <a:lstStyle/>
           <a:p>
-            <a:pPr indent="0" marL="0">
-              <a:buNone/>
-            </a:pPr>
-            <a:r>
-              <a:rPr lang="en-US" sz="1000" b="1" spc="150" kern="0" dirty="0">
+            <a:pPr marL="0" indent="0">
+              <a:buNone/>
+            </a:pPr>
+            <a:r>
+              <a:rPr lang="en-US" sz="1000" b="1" kern="0" spc="150" dirty="0">
                 <a:solidFill>
                   <a:srgbClr val="B4690E"/>
                 </a:solidFill>
@@ -8648,7 +8416,7 @@
           <a:bodyPr wrap="square" lIns="0" tIns="0" rIns="0" bIns="0" rtlCol="0" anchor="ctr"/>
           <a:lstStyle/>
           <a:p>
-            <a:pPr indent="0" marL="0">
+            <a:pPr marL="0" indent="0">
               <a:buNone/>
             </a:pPr>
             <a:r>
@@ -8687,7 +8455,7 @@
           <a:bodyPr wrap="square" lIns="0" tIns="0" rIns="0" bIns="0" rtlCol="0" anchor="ctr"/>
           <a:lstStyle/>
           <a:p>
-            <a:pPr indent="0" marL="0">
+            <a:pPr marL="0" indent="0">
               <a:lnSpc>
                 <a:spcPct val="115000"/>
               </a:lnSpc>
@@ -8756,11 +8524,11 @@
           <a:bodyPr wrap="square" lIns="0" tIns="0" rIns="0" bIns="0" rtlCol="0" anchor="ctr"/>
           <a:lstStyle/>
           <a:p>
-            <a:pPr indent="0" marL="0">
-              <a:buNone/>
-            </a:pPr>
-            <a:r>
-              <a:rPr lang="en-US" sz="1000" b="1" spc="150" kern="0" dirty="0">
+            <a:pPr marL="0" indent="0">
+              <a:buNone/>
+            </a:pPr>
+            <a:r>
+              <a:rPr lang="en-US" sz="1000" b="1" kern="0" spc="150" dirty="0">
                 <a:solidFill>
                   <a:srgbClr val="B4690E"/>
                 </a:solidFill>
@@ -8795,7 +8563,7 @@
           <a:bodyPr wrap="square" lIns="0" tIns="0" rIns="0" bIns="0" rtlCol="0" anchor="ctr"/>
           <a:lstStyle/>
           <a:p>
-            <a:pPr indent="0" marL="0">
+            <a:pPr marL="0" indent="0">
               <a:buNone/>
             </a:pPr>
             <a:r>
@@ -8834,7 +8602,7 @@
           <a:bodyPr wrap="square" lIns="0" tIns="0" rIns="0" bIns="0" rtlCol="0" anchor="ctr"/>
           <a:lstStyle/>
           <a:p>
-            <a:pPr indent="0" marL="0">
+            <a:pPr marL="0" indent="0">
               <a:lnSpc>
                 <a:spcPct val="115000"/>
               </a:lnSpc>
@@ -8903,11 +8671,11 @@
           <a:bodyPr wrap="square" lIns="0" tIns="0" rIns="0" bIns="0" rtlCol="0" anchor="ctr"/>
           <a:lstStyle/>
           <a:p>
-            <a:pPr indent="0" marL="0">
-              <a:buNone/>
-            </a:pPr>
-            <a:r>
-              <a:rPr lang="en-US" sz="1000" b="1" spc="150" kern="0" dirty="0">
+            <a:pPr marL="0" indent="0">
+              <a:buNone/>
+            </a:pPr>
+            <a:r>
+              <a:rPr lang="en-US" sz="1000" b="1" kern="0" spc="150" dirty="0">
                 <a:solidFill>
                   <a:srgbClr val="1E2761"/>
                 </a:solidFill>
@@ -8942,7 +8710,7 @@
           <a:bodyPr wrap="square" lIns="0" tIns="0" rIns="0" bIns="0" rtlCol="0" anchor="ctr"/>
           <a:lstStyle/>
           <a:p>
-            <a:pPr indent="0" marL="0">
+            <a:pPr marL="0" indent="0">
               <a:buNone/>
             </a:pPr>
             <a:r>
@@ -8981,7 +8749,7 @@
           <a:bodyPr wrap="square" lIns="0" tIns="0" rIns="0" bIns="0" rtlCol="0" anchor="ctr"/>
           <a:lstStyle/>
           <a:p>
-            <a:pPr indent="0" marL="0">
+            <a:pPr marL="0" indent="0">
               <a:lnSpc>
                 <a:spcPct val="115000"/>
               </a:lnSpc>
@@ -9050,11 +8818,11 @@
           <a:bodyPr wrap="square" lIns="0" tIns="0" rIns="0" bIns="0" rtlCol="0" anchor="ctr"/>
           <a:lstStyle/>
           <a:p>
-            <a:pPr indent="0" marL="0">
-              <a:buNone/>
-            </a:pPr>
-            <a:r>
-              <a:rPr lang="en-US" sz="1000" b="1" spc="150" kern="0" dirty="0">
+            <a:pPr marL="0" indent="0">
+              <a:buNone/>
+            </a:pPr>
+            <a:r>
+              <a:rPr lang="en-US" sz="1000" b="1" kern="0" spc="150" dirty="0">
                 <a:solidFill>
                   <a:srgbClr val="1E2761"/>
                 </a:solidFill>
@@ -9089,7 +8857,7 @@
           <a:bodyPr wrap="square" lIns="0" tIns="0" rIns="0" bIns="0" rtlCol="0" anchor="ctr"/>
           <a:lstStyle/>
           <a:p>
-            <a:pPr indent="0" marL="0">
+            <a:pPr marL="0" indent="0">
               <a:buNone/>
             </a:pPr>
             <a:r>
@@ -9128,7 +8896,7 @@
           <a:bodyPr wrap="square" lIns="0" tIns="0" rIns="0" bIns="0" rtlCol="0" anchor="ctr"/>
           <a:lstStyle/>
           <a:p>
-            <a:pPr indent="0" marL="0">
+            <a:pPr marL="0" indent="0">
               <a:lnSpc>
                 <a:spcPct val="115000"/>
               </a:lnSpc>
@@ -9450,4 +9218,299 @@
     </a:ext>
   </a:extLst>
 </a:theme>
+</file>
+
+<file path=ppt/theme/theme2.xml><?xml version="1.0" encoding="utf-8"?>
+<a:theme xmlns:a="http://schemas.openxmlformats.org/drawingml/2006/main" name="Office Theme">
+  <a:themeElements>
+    <a:clrScheme name="Office">
+      <a:dk1>
+        <a:sysClr val="windowText" lastClr="000000"/>
+      </a:dk1>
+      <a:lt1>
+        <a:sysClr val="window" lastClr="FFFFFF"/>
+      </a:lt1>
+      <a:dk2>
+        <a:srgbClr val="44546A"/>
+      </a:dk2>
+      <a:lt2>
+        <a:srgbClr val="E7E6E6"/>
+      </a:lt2>
+      <a:accent1>
+        <a:srgbClr val="4472C4"/>
+      </a:accent1>
+      <a:accent2>
+        <a:srgbClr val="ED7D31"/>
+      </a:accent2>
+      <a:accent3>
+        <a:srgbClr val="A5A5A5"/>
+      </a:accent3>
+      <a:accent4>
+        <a:srgbClr val="FFC000"/>
+      </a:accent4>
+      <a:accent5>
+        <a:srgbClr val="5B9BD5"/>
+      </a:accent5>
+      <a:accent6>
+        <a:srgbClr val="70AD47"/>
+      </a:accent6>
+      <a:hlink>
+        <a:srgbClr val="0563C1"/>
+      </a:hlink>
+      <a:folHlink>
+        <a:srgbClr val="954F72"/>
+      </a:folHlink>
+    </a:clrScheme>
+    <a:fontScheme name="Office">
+      <a:majorFont>
+        <a:latin typeface="Calibri Light" panose="020F0302020204030204"/>
+        <a:ea typeface=""/>
+        <a:cs typeface=""/>
+        <a:font script="Jpan" typeface="游ゴシック Light"/>
+        <a:font script="Hang" typeface="맑은 고딕"/>
+        <a:font script="Hans" typeface="等线 Light"/>
+        <a:font script="Hant" typeface="新細明體"/>
+        <a:font script="Arab" typeface="Times New Roman"/>
+        <a:font script="Hebr" typeface="Times New Roman"/>
+        <a:font script="Thai" typeface="Angsana New"/>
+        <a:font script="Ethi" typeface="Nyala"/>
+        <a:font script="Beng" typeface="Vrinda"/>
+        <a:font script="Gujr" typeface="Shruti"/>
+        <a:font script="Khmr" typeface="MoolBoran"/>
+        <a:font script="Knda" typeface="Tunga"/>
+        <a:font script="Guru" typeface="Raavi"/>
+        <a:font script="Cans" typeface="Euphemia"/>
+        <a:font script="Cher" typeface="Plantagenet Cherokee"/>
+        <a:font script="Yiii" typeface="Microsoft Yi Baiti"/>
+        <a:font script="Tibt" typeface="Microsoft Himalaya"/>
+        <a:font script="Thaa" typeface="MV Boli"/>
+        <a:font script="Deva" typeface="Mangal"/>
+        <a:font script="Telu" typeface="Gautami"/>
+        <a:font script="Taml" typeface="Latha"/>
+        <a:font script="Syrc" typeface="Estrangelo Edessa"/>
+        <a:font script="Orya" typeface="Kalinga"/>
+        <a:font script="Mlym" typeface="Kartika"/>
+        <a:font script="Laoo" typeface="DokChampa"/>
+        <a:font script="Sinh" typeface="Iskoola Pota"/>
+        <a:font script="Mong" typeface="Mongolian Baiti"/>
+        <a:font script="Viet" typeface="Times New Roman"/>
+        <a:font script="Uigh" typeface="Microsoft Uighur"/>
+        <a:font script="Geor" typeface="Sylfaen"/>
+        <a:font script="Armn" typeface="Arial"/>
+        <a:font script="Bugi" typeface="Leelawadee UI"/>
+        <a:font script="Bopo" typeface="Microsoft JhengHei"/>
+        <a:font script="Java" typeface="Javanese Text"/>
+        <a:font script="Lisu" typeface="Segoe UI"/>
+        <a:font script="Mymr" typeface="Myanmar Text"/>
+        <a:font script="Nkoo" typeface="Ebrima"/>
+        <a:font script="Olck" typeface="Nirmala UI"/>
+        <a:font script="Osma" typeface="Ebrima"/>
+        <a:font script="Phag" typeface="Phagspa"/>
+        <a:font script="Syrn" typeface="Estrangelo Edessa"/>
+        <a:font script="Syrj" typeface="Estrangelo Edessa"/>
+        <a:font script="Syre" typeface="Estrangelo Edessa"/>
+        <a:font script="Sora" typeface="Nirmala UI"/>
+        <a:font script="Tale" typeface="Microsoft Tai Le"/>
+        <a:font script="Talu" typeface="Microsoft New Tai Lue"/>
+        <a:font script="Tfng" typeface="Ebrima"/>
+      </a:majorFont>
+      <a:minorFont>
+        <a:latin typeface="Calibri" panose="020F0502020204030204"/>
+        <a:ea typeface=""/>
+        <a:cs typeface=""/>
+        <a:font script="Jpan" typeface="游ゴシック"/>
+        <a:font script="Hang" typeface="맑은 고딕"/>
+        <a:font script="Hans" typeface="等线"/>
+        <a:font script="Hant" typeface="新細明體"/>
+        <a:font script="Arab" typeface="Arial"/>
+        <a:font script="Hebr" typeface="Arial"/>
+        <a:font script="Thai" typeface="Cordia New"/>
+        <a:font script="Ethi" typeface="Nyala"/>
+        <a:font script="Beng" typeface="Vrinda"/>
+        <a:font script="Gujr" typeface="Shruti"/>
+        <a:font script="Khmr" typeface="DaunPenh"/>
+        <a:font script="Knda" typeface="Tunga"/>
+        <a:font script="Guru" typeface="Raavi"/>
+        <a:font script="Cans" typeface="Euphemia"/>
+        <a:font script="Cher" typeface="Plantagenet Cherokee"/>
+        <a:font script="Yiii" typeface="Microsoft Yi Baiti"/>
+        <a:font script="Tibt" typeface="Microsoft Himalaya"/>
+        <a:font script="Thaa" typeface="MV Boli"/>
+        <a:font script="Deva" typeface="Mangal"/>
+        <a:font script="Telu" typeface="Gautami"/>
+        <a:font script="Taml" typeface="Latha"/>
+        <a:font script="Syrc" typeface="Estrangelo Edessa"/>
+        <a:font script="Orya" typeface="Kalinga"/>
+        <a:font script="Mlym" typeface="Kartika"/>
+        <a:font script="Laoo" typeface="DokChampa"/>
+        <a:font script="Sinh" typeface="Iskoola Pota"/>
+        <a:font script="Mong" typeface="Mongolian Baiti"/>
+        <a:font script="Viet" typeface="Arial"/>
+        <a:font script="Uigh" typeface="Microsoft Uighur"/>
+        <a:font script="Geor" typeface="Sylfaen"/>
+        <a:font script="Armn" typeface="Arial"/>
+        <a:font script="Bugi" typeface="Leelawadee UI"/>
+        <a:font script="Bopo" typeface="Microsoft JhengHei"/>
+        <a:font script="Java" typeface="Javanese Text"/>
+        <a:font script="Lisu" typeface="Segoe UI"/>
+        <a:font script="Mymr" typeface="Myanmar Text"/>
+        <a:font script="Nkoo" typeface="Ebrima"/>
+        <a:font script="Olck" typeface="Nirmala UI"/>
+        <a:font script="Osma" typeface="Ebrima"/>
+        <a:font script="Phag" typeface="Phagspa"/>
+        <a:font script="Syrn" typeface="Estrangelo Edessa"/>
+        <a:font script="Syrj" typeface="Estrangelo Edessa"/>
+        <a:font script="Syre" typeface="Estrangelo Edessa"/>
+        <a:font script="Sora" typeface="Nirmala UI"/>
+        <a:font script="Tale" typeface="Microsoft Tai Le"/>
+        <a:font script="Talu" typeface="Microsoft New Tai Lue"/>
+        <a:font script="Tfng" typeface="Ebrima"/>
+      </a:minorFont>
+    </a:fontScheme>
+    <a:fmtScheme name="Office">
+      <a:fillStyleLst>
+        <a:solidFill>
+          <a:schemeClr val="phClr"/>
+        </a:solidFill>
+        <a:gradFill rotWithShape="1">
+          <a:gsLst>
+            <a:gs pos="0">
+              <a:schemeClr val="phClr">
+                <a:lumMod val="110000"/>
+                <a:satMod val="105000"/>
+                <a:tint val="67000"/>
+              </a:schemeClr>
+            </a:gs>
+            <a:gs pos="50000">
+              <a:schemeClr val="phClr">
+                <a:lumMod val="105000"/>
+                <a:satMod val="103000"/>
+                <a:tint val="73000"/>
+              </a:schemeClr>
+            </a:gs>
+            <a:gs pos="100000">
+              <a:schemeClr val="phClr">
+                <a:lumMod val="105000"/>
+                <a:satMod val="109000"/>
+                <a:tint val="81000"/>
+              </a:schemeClr>
+            </a:gs>
+          </a:gsLst>
+          <a:lin ang="5400000" scaled="0"/>
+        </a:gradFill>
+        <a:gradFill rotWithShape="1">
+          <a:gsLst>
+            <a:gs pos="0">
+              <a:schemeClr val="phClr">
+                <a:satMod val="103000"/>
+                <a:lumMod val="102000"/>
+                <a:tint val="94000"/>
+              </a:schemeClr>
+            </a:gs>
+            <a:gs pos="50000">
+              <a:schemeClr val="phClr">
+                <a:satMod val="110000"/>
+                <a:lumMod val="100000"/>
+                <a:shade val="100000"/>
+              </a:schemeClr>
+            </a:gs>
+            <a:gs pos="100000">
+              <a:schemeClr val="phClr">
+                <a:lumMod val="99000"/>
+                <a:satMod val="120000"/>
+                <a:shade val="78000"/>
+              </a:schemeClr>
+            </a:gs>
+          </a:gsLst>
+          <a:lin ang="5400000" scaled="0"/>
+        </a:gradFill>
+      </a:fillStyleLst>
+      <a:lnStyleLst>
+        <a:ln w="6350" cap="flat" cmpd="sng" algn="ctr">
+          <a:solidFill>
+            <a:schemeClr val="phClr"/>
+          </a:solidFill>
+          <a:prstDash val="solid"/>
+          <a:miter lim="800000"/>
+        </a:ln>
+        <a:ln w="12700" cap="flat" cmpd="sng" algn="ctr">
+          <a:solidFill>
+            <a:schemeClr val="phClr"/>
+          </a:solidFill>
+          <a:prstDash val="solid"/>
+          <a:miter lim="800000"/>
+        </a:ln>
+        <a:ln w="19050" cap="flat" cmpd="sng" algn="ctr">
+          <a:solidFill>
+            <a:schemeClr val="phClr"/>
+          </a:solidFill>
+          <a:prstDash val="solid"/>
+          <a:miter lim="800000"/>
+        </a:ln>
+      </a:lnStyleLst>
+      <a:effectStyleLst>
+        <a:effectStyle>
+          <a:effectLst/>
+        </a:effectStyle>
+        <a:effectStyle>
+          <a:effectLst/>
+        </a:effectStyle>
+        <a:effectStyle>
+          <a:effectLst>
+            <a:outerShdw blurRad="57150" dist="19050" dir="5400000" algn="ctr" rotWithShape="0">
+              <a:srgbClr val="000000">
+                <a:alpha val="63000"/>
+              </a:srgbClr>
+            </a:outerShdw>
+          </a:effectLst>
+        </a:effectStyle>
+      </a:effectStyleLst>
+      <a:bgFillStyleLst>
+        <a:solidFill>
+          <a:schemeClr val="phClr"/>
+        </a:solidFill>
+        <a:solidFill>
+          <a:schemeClr val="phClr">
+            <a:tint val="95000"/>
+            <a:satMod val="170000"/>
+          </a:schemeClr>
+        </a:solidFill>
+        <a:gradFill rotWithShape="1">
+          <a:gsLst>
+            <a:gs pos="0">
+              <a:schemeClr val="phClr">
+                <a:tint val="93000"/>
+                <a:satMod val="150000"/>
+                <a:shade val="98000"/>
+                <a:lumMod val="102000"/>
+              </a:schemeClr>
+            </a:gs>
+            <a:gs pos="50000">
+              <a:schemeClr val="phClr">
+                <a:tint val="98000"/>
+                <a:satMod val="130000"/>
+                <a:shade val="90000"/>
+                <a:lumMod val="103000"/>
+              </a:schemeClr>
+            </a:gs>
+            <a:gs pos="100000">
+              <a:schemeClr val="phClr">
+                <a:shade val="63000"/>
+                <a:satMod val="120000"/>
+              </a:schemeClr>
+            </a:gs>
+          </a:gsLst>
+          <a:lin ang="5400000" scaled="0"/>
+        </a:gradFill>
+      </a:bgFillStyleLst>
+    </a:fmtScheme>
+  </a:themeElements>
+  <a:objectDefaults/>
+  <a:extraClrSchemeLst/>
+  <a:extLst>
+    <a:ext uri="{05A4C25C-085E-4340-85A3-A5531E510DB2}">
+      <thm15:themeFamily xmlns:thm15="http://schemas.microsoft.com/office/thememl/2012/main" name="Office Theme" id="{62F939B6-93AF-4DB8-9C6B-D6C7DFDC589F}" vid="{4A3C46E8-61CC-4603-A589-7422A47A8E4A}"/>
+    </a:ext>
+  </a:extLst>
+</a:theme>
 </file>